--- a/docs/2026-2/cea055-estatistica-probabilidade/04-tecnicas-de-contagem/arquivos/Aula_04_Tecnicas_de_Contagem_SITE.pptx
+++ b/docs/2026-2/cea055-estatistica-probabilidade/04-tecnicas-de-contagem/arquivos/Aula_04_Tecnicas_de_Contagem_SITE.pptx
@@ -5,7 +5,7 @@
     <p:sldMasterId id="2147483648" r:id="rId1"/>
   </p:sldMasterIdLst>
   <p:notesMasterIdLst>
-    <p:notesMasterId r:id="rId34"/>
+    <p:notesMasterId r:id="rId23"/>
   </p:notesMasterIdLst>
   <p:sldIdLst>
     <p:sldId id="500" r:id="rId2"/>
@@ -27,8 +27,8 @@
     <p:sldId id="611" r:id="rId18"/>
     <p:sldId id="612" r:id="rId19"/>
     <p:sldId id="613" r:id="rId20"/>
-    <p:sldId id="624" r:id="rId31"/>
-    <p:sldId id="625" r:id="rId32"/>
+    <p:sldId id="624" r:id="rId21"/>
+    <p:sldId id="625" r:id="rId22"/>
   </p:sldIdLst>
   <p:sldSz cx="12192000" cy="6858000"/>
   <p:notesSz cx="7099300" cy="10234613"/>
@@ -243,7 +243,7 @@
           <a:p>
             <a:fld id="{44623A65-BD25-40B6-8815-498297225DF7}" type="datetimeFigureOut">
               <a:rPr lang="pt-BR" smtClean="0"/>
-              <a:t>07/09/2026</a:t>
+              <a:t>22/10/2026</a:t>
             </a:fld>
             <a:endParaRPr lang="pt-BR" dirty="0"/>
           </a:p>
@@ -657,7 +657,7 @@
           <a:p>
             <a:fld id="{5B45E566-B383-4B2D-B951-1136FD38326E}" type="datetimeFigureOut">
               <a:rPr lang="pt-BR" smtClean="0"/>
-              <a:t>07/09/2026</a:t>
+              <a:t>22/10/2026</a:t>
             </a:fld>
             <a:endParaRPr lang="pt-BR" dirty="0"/>
           </a:p>
@@ -855,7 +855,7 @@
           <a:p>
             <a:fld id="{5B45E566-B383-4B2D-B951-1136FD38326E}" type="datetimeFigureOut">
               <a:rPr lang="pt-BR" smtClean="0"/>
-              <a:t>07/09/2026</a:t>
+              <a:t>22/10/2026</a:t>
             </a:fld>
             <a:endParaRPr lang="pt-BR" dirty="0"/>
           </a:p>
@@ -1063,7 +1063,7 @@
           <a:p>
             <a:fld id="{5B45E566-B383-4B2D-B951-1136FD38326E}" type="datetimeFigureOut">
               <a:rPr lang="pt-BR" smtClean="0"/>
-              <a:t>07/09/2026</a:t>
+              <a:t>22/10/2026</a:t>
             </a:fld>
             <a:endParaRPr lang="pt-BR" dirty="0"/>
           </a:p>
@@ -1261,7 +1261,7 @@
           <a:p>
             <a:fld id="{5B45E566-B383-4B2D-B951-1136FD38326E}" type="datetimeFigureOut">
               <a:rPr lang="pt-BR" smtClean="0"/>
-              <a:t>07/09/2026</a:t>
+              <a:t>22/10/2026</a:t>
             </a:fld>
             <a:endParaRPr lang="pt-BR" dirty="0"/>
           </a:p>
@@ -1536,7 +1536,7 @@
           <a:p>
             <a:fld id="{5B45E566-B383-4B2D-B951-1136FD38326E}" type="datetimeFigureOut">
               <a:rPr lang="pt-BR" smtClean="0"/>
-              <a:t>07/09/2026</a:t>
+              <a:t>22/10/2026</a:t>
             </a:fld>
             <a:endParaRPr lang="pt-BR" dirty="0"/>
           </a:p>
@@ -1801,7 +1801,7 @@
           <a:p>
             <a:fld id="{5B45E566-B383-4B2D-B951-1136FD38326E}" type="datetimeFigureOut">
               <a:rPr lang="pt-BR" smtClean="0"/>
-              <a:t>07/09/2026</a:t>
+              <a:t>22/10/2026</a:t>
             </a:fld>
             <a:endParaRPr lang="pt-BR" dirty="0"/>
           </a:p>
@@ -2213,7 +2213,7 @@
           <a:p>
             <a:fld id="{5B45E566-B383-4B2D-B951-1136FD38326E}" type="datetimeFigureOut">
               <a:rPr lang="pt-BR" smtClean="0"/>
-              <a:t>07/09/2026</a:t>
+              <a:t>22/10/2026</a:t>
             </a:fld>
             <a:endParaRPr lang="pt-BR" dirty="0"/>
           </a:p>
@@ -2354,7 +2354,7 @@
           <a:p>
             <a:fld id="{5B45E566-B383-4B2D-B951-1136FD38326E}" type="datetimeFigureOut">
               <a:rPr lang="pt-BR" smtClean="0"/>
-              <a:t>07/09/2026</a:t>
+              <a:t>22/10/2026</a:t>
             </a:fld>
             <a:endParaRPr lang="pt-BR" dirty="0"/>
           </a:p>
@@ -2467,7 +2467,7 @@
           <a:p>
             <a:fld id="{5B45E566-B383-4B2D-B951-1136FD38326E}" type="datetimeFigureOut">
               <a:rPr lang="pt-BR" smtClean="0"/>
-              <a:t>07/09/2026</a:t>
+              <a:t>22/10/2026</a:t>
             </a:fld>
             <a:endParaRPr lang="pt-BR" dirty="0"/>
           </a:p>
@@ -2778,7 +2778,7 @@
           <a:p>
             <a:fld id="{5B45E566-B383-4B2D-B951-1136FD38326E}" type="datetimeFigureOut">
               <a:rPr lang="pt-BR" smtClean="0"/>
-              <a:t>07/09/2026</a:t>
+              <a:t>22/10/2026</a:t>
             </a:fld>
             <a:endParaRPr lang="pt-BR" dirty="0"/>
           </a:p>
@@ -3066,7 +3066,7 @@
           <a:p>
             <a:fld id="{5B45E566-B383-4B2D-B951-1136FD38326E}" type="datetimeFigureOut">
               <a:rPr lang="pt-BR" smtClean="0"/>
-              <a:t>07/09/2026</a:t>
+              <a:t>22/10/2026</a:t>
             </a:fld>
             <a:endParaRPr lang="pt-BR" dirty="0"/>
           </a:p>
@@ -3331,7 +3331,7 @@
           <a:p>
             <a:fld id="{5B45E566-B383-4B2D-B951-1136FD38326E}" type="datetimeFigureOut">
               <a:rPr lang="pt-BR" smtClean="0"/>
-              <a:t>07/09/2026</a:t>
+              <a:t>22/10/2026</a:t>
             </a:fld>
             <a:endParaRPr lang="pt-BR" dirty="0"/>
           </a:p>
@@ -3813,7 +3813,7 @@
         <p:spPr>
           <a:xfrm>
             <a:off x="881687" y="1441868"/>
-            <a:ext cx="10067277" cy="5122941"/>
+            <a:ext cx="10067277" cy="4199611"/>
           </a:xfrm>
           <a:prstGeom prst="rect">
             <a:avLst/>
@@ -3891,15 +3891,23 @@
             </a:pPr>
             <a:r>
               <a:rPr lang="pt-BR" sz="2000" dirty="0"/>
-              <a:t>Montgomery, Runger. </a:t>
-            </a:r>
-            <a:r>
-              <a:rPr lang="pt-BR" sz="2000" b="1" dirty="0"/>
-              <a:t>Applied Statistics and Probability for Engineers</a:t>
+              <a:t>Montgomery, Runger</a:t>
+            </a:r>
+            <a:r>
+              <a:rPr lang="pt-BR" sz="2000"/>
+              <a:t>. </a:t>
+            </a:r>
+            <a:r>
+              <a:rPr lang="pt-BR" sz="2000" b="1"/>
+              <a:t>Estatística Aplicada e Probabilidade para Engenheiros</a:t>
+            </a:r>
+            <a:r>
+              <a:rPr lang="pt-BR" sz="2000"/>
+              <a:t>, 7ª ed. — </a:t>
             </a:r>
             <a:r>
               <a:rPr lang="pt-BR" sz="2000" dirty="0"/>
-              <a:t>, 7th ed — Cap. 2 (2.2)</a:t>
+              <a:t>Cap. 2 (2.2)</a:t>
             </a:r>
           </a:p>
           <a:p>
@@ -4031,447 +4039,6 @@
 </file>
 
 <file path=ppt/slides/slide10.xml><?xml version="1.0" encoding="utf-8"?>
-<p:sld xmlns:a="http://schemas.openxmlformats.org/drawingml/2006/main" xmlns:r="http://schemas.openxmlformats.org/officeDocument/2006/relationships" xmlns:p="http://schemas.openxmlformats.org/presentationml/2006/main">
-  <p:cSld>
-    <p:spTree>
-      <p:nvGrpSpPr>
-        <p:cNvPr id="1" name=""/>
-        <p:cNvGrpSpPr/>
-        <p:nvPr/>
-      </p:nvGrpSpPr>
-      <p:grpSpPr>
-        <a:xfrm>
-          <a:off x="0" y="0"/>
-          <a:ext cx="0" cy="0"/>
-          <a:chOff x="0" y="0"/>
-          <a:chExt cx="0" cy="0"/>
-        </a:xfrm>
-      </p:grpSpPr>
-      <mc:AlternateContent xmlns:mc="http://schemas.openxmlformats.org/markup-compatibility/2006" xmlns:a14="http://schemas.microsoft.com/office/drawing/2010/main">
-        <mc:Choice Requires="a14">
-          <p:sp>
-            <p:nvSpPr>
-              <p:cNvPr id="6" name="CaixaDeTexto 5">
-                <a:extLst>
-                  <a:ext uri="{FF2B5EF4-FFF2-40B4-BE49-F238E27FC236}">
-                    <a16:creationId xmlns:a16="http://schemas.microsoft.com/office/drawing/2014/main" id="{720B10DA-C761-4DEE-8D86-E170E1C2E981}"/>
-                  </a:ext>
-                </a:extLst>
-              </p:cNvPr>
-              <p:cNvSpPr txBox="1"/>
-              <p:nvPr/>
-            </p:nvSpPr>
-            <p:spPr>
-              <a:xfrm>
-                <a:off x="585596" y="661503"/>
-                <a:ext cx="10748061" cy="5196166"/>
-              </a:xfrm>
-              <a:prstGeom prst="rect">
-                <a:avLst/>
-              </a:prstGeom>
-              <a:noFill/>
-            </p:spPr>
-            <p:txBody>
-              <a:bodyPr wrap="square" rtlCol="0">
-                <a:spAutoFit/>
-              </a:bodyPr>
-              <a:lstStyle/>
-              <a:p>
-                <a:pPr>
-                  <a:lnSpc>
-                    <a:spcPct val="150000"/>
-                  </a:lnSpc>
-                </a:pPr>
-                <a:r>
-                  <a:rPr lang="pt-BR" sz="2800" b="1" dirty="0"/>
-                  <a:t>Permutação - </a:t>
-                </a:r>
-                <a14:m>
-                  <m:oMath xmlns:m="http://schemas.openxmlformats.org/officeDocument/2006/math">
-                    <m:sSub>
-                      <m:sSubPr>
-                        <m:ctrlPr>
-                          <a:rPr lang="pt-BR" sz="2800" b="1" i="1" smtClean="0">
-                            <a:latin typeface="Cambria Math" panose="02040503050406030204" pitchFamily="18" charset="0"/>
-                          </a:rPr>
-                        </m:ctrlPr>
-                      </m:sSubPr>
-                      <m:e>
-                        <m:r>
-                          <a:rPr lang="pt-BR" sz="2800" b="1" i="1" smtClean="0">
-                            <a:latin typeface="Cambria Math" panose="02040503050406030204" pitchFamily="18" charset="0"/>
-                          </a:rPr>
-                          <m:t>𝑷</m:t>
-                        </m:r>
-                      </m:e>
-                      <m:sub>
-                        <m:r>
-                          <a:rPr lang="pt-BR" sz="2800" b="1" i="1" smtClean="0">
-                            <a:latin typeface="Cambria Math" panose="02040503050406030204" pitchFamily="18" charset="0"/>
-                          </a:rPr>
-                          <m:t>𝒏</m:t>
-                        </m:r>
-                      </m:sub>
-                    </m:sSub>
-                  </m:oMath>
-                </a14:m>
-                <a:r>
-                  <a:rPr lang="pt-BR" sz="2800" b="1" dirty="0"/>
-                  <a:t> </a:t>
-                </a:r>
-                <a:r>
-                  <a:rPr lang="pt-BR" sz="2800" dirty="0"/>
-                  <a:t>(ou permutação simples)</a:t>
-                </a:r>
-              </a:p>
-              <a:p>
-                <a:pPr>
-                  <a:lnSpc>
-                    <a:spcPct val="150000"/>
-                  </a:lnSpc>
-                </a:pPr>
-                <a:r>
-                  <a:rPr lang="pt-BR" sz="2800" dirty="0"/>
-                  <a:t>Uma permutação de um conjunto é uma sequência ordenada de seus elementos.</a:t>
-                </a:r>
-              </a:p>
-              <a:p>
-                <a:pPr>
-                  <a:lnSpc>
-                    <a:spcPct val="150000"/>
-                  </a:lnSpc>
-                </a:pPr>
-                <a:endParaRPr lang="pt-BR" sz="2800" b="1" dirty="0"/>
-              </a:p>
-              <a:p>
-                <a:pPr>
-                  <a:lnSpc>
-                    <a:spcPct val="150000"/>
-                  </a:lnSpc>
-                </a:pPr>
-                <a:r>
-                  <a:rPr lang="pt-BR" sz="2800" b="1" dirty="0"/>
-                  <a:t>Exemplo:</a:t>
-                </a:r>
-                <a:r>
-                  <a:rPr lang="pt-BR" sz="2800" dirty="0"/>
-                  <a:t> Quantas permutações existem do conjunto </a:t>
-                </a:r>
-                <a14:m>
-                  <m:oMath xmlns:m="http://schemas.openxmlformats.org/officeDocument/2006/math">
-                    <m:r>
-                      <a:rPr lang="pt-BR" sz="2800" i="1" dirty="0" smtClean="0">
-                        <a:latin typeface="Cambria Math" panose="02040503050406030204" pitchFamily="18" charset="0"/>
-                      </a:rPr>
-                      <m:t>𝑆</m:t>
-                    </m:r>
-                    <m:r>
-                      <a:rPr lang="pt-BR" sz="2800" i="1" dirty="0" smtClean="0">
-                        <a:latin typeface="Cambria Math" panose="02040503050406030204" pitchFamily="18" charset="0"/>
-                      </a:rPr>
-                      <m:t> = {</m:t>
-                    </m:r>
-                    <m:r>
-                      <a:rPr lang="pt-BR" sz="2800" i="1" dirty="0" smtClean="0">
-                        <a:latin typeface="Cambria Math" panose="02040503050406030204" pitchFamily="18" charset="0"/>
-                      </a:rPr>
-                      <m:t>𝑎</m:t>
-                    </m:r>
-                    <m:r>
-                      <a:rPr lang="pt-BR" sz="2800" i="1" dirty="0" smtClean="0">
-                        <a:latin typeface="Cambria Math" panose="02040503050406030204" pitchFamily="18" charset="0"/>
-                      </a:rPr>
-                      <m:t>, </m:t>
-                    </m:r>
-                    <m:r>
-                      <a:rPr lang="pt-BR" sz="2800" i="1" dirty="0" smtClean="0">
-                        <a:latin typeface="Cambria Math" panose="02040503050406030204" pitchFamily="18" charset="0"/>
-                      </a:rPr>
-                      <m:t>𝑏</m:t>
-                    </m:r>
-                    <m:r>
-                      <a:rPr lang="pt-BR" sz="2800" i="1" dirty="0" smtClean="0">
-                        <a:latin typeface="Cambria Math" panose="02040503050406030204" pitchFamily="18" charset="0"/>
-                      </a:rPr>
-                      <m:t>, </m:t>
-                    </m:r>
-                    <m:r>
-                      <a:rPr lang="pt-BR" sz="2800" i="1" dirty="0" smtClean="0">
-                        <a:latin typeface="Cambria Math" panose="02040503050406030204" pitchFamily="18" charset="0"/>
-                      </a:rPr>
-                      <m:t>𝑐</m:t>
-                    </m:r>
-                    <m:r>
-                      <a:rPr lang="pt-BR" sz="2800" i="1" dirty="0" smtClean="0">
-                        <a:latin typeface="Cambria Math" panose="02040503050406030204" pitchFamily="18" charset="0"/>
-                      </a:rPr>
-                      <m:t>}</m:t>
-                    </m:r>
-                  </m:oMath>
-                </a14:m>
-                <a:r>
-                  <a:rPr lang="pt-BR" sz="2800" dirty="0"/>
-                  <a:t>?</a:t>
-                </a:r>
-              </a:p>
-              <a:p>
-                <a:pPr>
-                  <a:lnSpc>
-                    <a:spcPct val="150000"/>
-                  </a:lnSpc>
-                </a:pPr>
-                <a:r>
-                  <a:rPr lang="pt-BR" sz="2800" dirty="0"/>
-                  <a:t>Resposta: </a:t>
-                </a:r>
-                <a14:m>
-                  <m:oMath xmlns:m="http://schemas.openxmlformats.org/officeDocument/2006/math">
-                    <m:r>
-                      <a:rPr lang="pt-BR" sz="2800" i="1" dirty="0" smtClean="0">
-                        <a:latin typeface="Cambria Math" panose="02040503050406030204" pitchFamily="18" charset="0"/>
-                      </a:rPr>
-                      <m:t>𝑎𝑏𝑐</m:t>
-                    </m:r>
-                    <m:r>
-                      <a:rPr lang="pt-BR" sz="2800" i="1" dirty="0" smtClean="0">
-                        <a:latin typeface="Cambria Math" panose="02040503050406030204" pitchFamily="18" charset="0"/>
-                      </a:rPr>
-                      <m:t>, </m:t>
-                    </m:r>
-                    <m:r>
-                      <a:rPr lang="pt-BR" sz="2800" i="1" dirty="0" err="1" smtClean="0">
-                        <a:latin typeface="Cambria Math" panose="02040503050406030204" pitchFamily="18" charset="0"/>
-                      </a:rPr>
-                      <m:t>𝑎𝑐𝑏</m:t>
-                    </m:r>
-                    <m:r>
-                      <a:rPr lang="pt-BR" sz="2800" i="1" dirty="0" smtClean="0">
-                        <a:latin typeface="Cambria Math" panose="02040503050406030204" pitchFamily="18" charset="0"/>
-                      </a:rPr>
-                      <m:t>, </m:t>
-                    </m:r>
-                    <m:r>
-                      <a:rPr lang="pt-BR" sz="2800" i="1" dirty="0" err="1" smtClean="0">
-                        <a:latin typeface="Cambria Math" panose="02040503050406030204" pitchFamily="18" charset="0"/>
-                      </a:rPr>
-                      <m:t>𝑏𝑎𝑐</m:t>
-                    </m:r>
-                    <m:r>
-                      <a:rPr lang="pt-BR" sz="2800" i="1" dirty="0" smtClean="0">
-                        <a:latin typeface="Cambria Math" panose="02040503050406030204" pitchFamily="18" charset="0"/>
-                      </a:rPr>
-                      <m:t>, </m:t>
-                    </m:r>
-                    <m:r>
-                      <a:rPr lang="pt-BR" sz="2800" i="1" dirty="0" err="1" smtClean="0">
-                        <a:latin typeface="Cambria Math" panose="02040503050406030204" pitchFamily="18" charset="0"/>
-                      </a:rPr>
-                      <m:t>𝑏𝑐𝑎</m:t>
-                    </m:r>
-                    <m:r>
-                      <a:rPr lang="pt-BR" sz="2800" i="1" dirty="0" smtClean="0">
-                        <a:latin typeface="Cambria Math" panose="02040503050406030204" pitchFamily="18" charset="0"/>
-                      </a:rPr>
-                      <m:t>, </m:t>
-                    </m:r>
-                    <m:r>
-                      <a:rPr lang="pt-BR" sz="2800" i="1" dirty="0" err="1" smtClean="0">
-                        <a:latin typeface="Cambria Math" panose="02040503050406030204" pitchFamily="18" charset="0"/>
-                      </a:rPr>
-                      <m:t>𝑐𝑎𝑏</m:t>
-                    </m:r>
-                    <m:r>
-                      <a:rPr lang="pt-BR" sz="2800" i="1" dirty="0" smtClean="0">
-                        <a:latin typeface="Cambria Math" panose="02040503050406030204" pitchFamily="18" charset="0"/>
-                      </a:rPr>
-                      <m:t>, </m:t>
-                    </m:r>
-                    <m:r>
-                      <a:rPr lang="pt-BR" sz="2800" i="1" dirty="0" err="1" smtClean="0">
-                        <a:latin typeface="Cambria Math" panose="02040503050406030204" pitchFamily="18" charset="0"/>
-                      </a:rPr>
-                      <m:t>𝑐𝑏𝑎</m:t>
-                    </m:r>
-                  </m:oMath>
-                </a14:m>
-                <a:r>
-                  <a:rPr lang="pt-BR" sz="2800" dirty="0"/>
-                  <a:t> — 6 permutações. </a:t>
-                </a:r>
-              </a:p>
-              <a:p>
-                <a:pPr>
-                  <a:lnSpc>
-                    <a:spcPct val="150000"/>
-                  </a:lnSpc>
-                </a:pPr>
-                <a:r>
-                  <a:rPr lang="pt-BR" sz="2800" dirty="0"/>
-                  <a:t>Em geral, o número de permutações de n elementos diferentes é </a:t>
-                </a:r>
-                <a14:m>
-                  <m:oMath xmlns:m="http://schemas.openxmlformats.org/officeDocument/2006/math">
-                    <m:sSub>
-                      <m:sSubPr>
-                        <m:ctrlPr>
-                          <a:rPr lang="pt-BR" sz="2800" b="0" i="1" smtClean="0">
-                            <a:latin typeface="Cambria Math" panose="02040503050406030204" pitchFamily="18" charset="0"/>
-                          </a:rPr>
-                        </m:ctrlPr>
-                      </m:sSubPr>
-                      <m:e>
-                        <m:r>
-                          <a:rPr lang="pt-BR" sz="2800" b="0" i="1" smtClean="0">
-                            <a:latin typeface="Cambria Math" panose="02040503050406030204" pitchFamily="18" charset="0"/>
-                          </a:rPr>
-                          <m:t>𝑃</m:t>
-                        </m:r>
-                      </m:e>
-                      <m:sub>
-                        <m:r>
-                          <a:rPr lang="pt-BR" sz="2800" b="0" i="1" smtClean="0">
-                            <a:latin typeface="Cambria Math" panose="02040503050406030204" pitchFamily="18" charset="0"/>
-                          </a:rPr>
-                          <m:t>𝑛</m:t>
-                        </m:r>
-                      </m:sub>
-                    </m:sSub>
-                    <m:r>
-                      <a:rPr lang="pt-BR" sz="2800" b="0" i="1" smtClean="0">
-                        <a:latin typeface="Cambria Math" panose="02040503050406030204" pitchFamily="18" charset="0"/>
-                      </a:rPr>
-                      <m:t>=</m:t>
-                    </m:r>
-                    <m:r>
-                      <a:rPr lang="pt-BR" sz="2800" b="0" i="1" smtClean="0">
-                        <a:latin typeface="Cambria Math" panose="02040503050406030204" pitchFamily="18" charset="0"/>
-                      </a:rPr>
-                      <m:t>𝑛</m:t>
-                    </m:r>
-                    <m:r>
-                      <a:rPr lang="pt-BR" sz="2800" b="0" i="1" smtClean="0">
-                        <a:latin typeface="Cambria Math" panose="02040503050406030204" pitchFamily="18" charset="0"/>
-                      </a:rPr>
-                      <m:t>!</m:t>
-                    </m:r>
-                  </m:oMath>
-                </a14:m>
-                <a:r>
-                  <a:rPr lang="pt-BR" sz="2800" dirty="0"/>
-                  <a:t> (aqui, </a:t>
-                </a:r>
-                <a14:m>
-                  <m:oMath xmlns:m="http://schemas.openxmlformats.org/officeDocument/2006/math">
-                    <m:r>
-                      <a:rPr lang="pt-BR" sz="2800" i="1" dirty="0" smtClean="0">
-                        <a:latin typeface="Cambria Math" panose="02040503050406030204" pitchFamily="18" charset="0"/>
-                      </a:rPr>
-                      <m:t>3! = 6</m:t>
-                    </m:r>
-                  </m:oMath>
-                </a14:m>
-                <a:r>
-                  <a:rPr lang="pt-BR" sz="2800" dirty="0"/>
-                  <a:t>).</a:t>
-                </a:r>
-              </a:p>
-            </p:txBody>
-          </p:sp>
-        </mc:Choice>
-        <mc:Fallback xmlns="">
-          <p:sp>
-            <p:nvSpPr>
-              <p:cNvPr id="6" name="CaixaDeTexto 5">
-                <a:extLst>
-                  <a:ext uri="{FF2B5EF4-FFF2-40B4-BE49-F238E27FC236}">
-                    <a16:creationId xmlns:a16="http://schemas.microsoft.com/office/drawing/2014/main" id="{720B10DA-C761-4DEE-8D86-E170E1C2E981}"/>
-                  </a:ext>
-                </a:extLst>
-              </p:cNvPr>
-              <p:cNvSpPr txBox="1">
-                <a:spLocks noRot="1" noChangeAspect="1" noMove="1" noResize="1" noEditPoints="1" noAdjustHandles="1" noChangeArrowheads="1" noChangeShapeType="1" noTextEdit="1"/>
-              </p:cNvSpPr>
-              <p:nvPr/>
-            </p:nvSpPr>
-            <p:spPr>
-              <a:xfrm>
-                <a:off x="585596" y="661503"/>
-                <a:ext cx="10748061" cy="5196166"/>
-              </a:xfrm>
-              <a:prstGeom prst="rect">
-                <a:avLst/>
-              </a:prstGeom>
-              <a:blipFill>
-                <a:blip r:embed="rId2"/>
-                <a:stretch>
-                  <a:fillRect l="-1134" b="-2465"/>
-                </a:stretch>
-              </a:blipFill>
-            </p:spPr>
-            <p:txBody>
-              <a:bodyPr/>
-              <a:lstStyle/>
-              <a:p>
-                <a:r>
-                  <a:rPr lang="pt-BR">
-                    <a:noFill/>
-                  </a:rPr>
-                  <a:t> </a:t>
-                </a:r>
-              </a:p>
-            </p:txBody>
-          </p:sp>
-        </mc:Fallback>
-      </mc:AlternateContent>
-      <p:sp>
-        <p:nvSpPr>
-          <p:cNvPr id="3" name="CaixaDeTexto 2">
-            <a:extLst>
-              <a:ext uri="{FF2B5EF4-FFF2-40B4-BE49-F238E27FC236}">
-                <a16:creationId xmlns:a16="http://schemas.microsoft.com/office/drawing/2014/main" id="{19131A04-B5D6-4211-8B49-4615DE5797E9}"/>
-              </a:ext>
-            </a:extLst>
-          </p:cNvPr>
-          <p:cNvSpPr txBox="1"/>
-          <p:nvPr/>
-        </p:nvSpPr>
-        <p:spPr>
-          <a:xfrm>
-            <a:off x="361188" y="6463893"/>
-            <a:ext cx="7772400" cy="308152"/>
-          </a:xfrm>
-          <a:prstGeom prst="rect">
-            <a:avLst/>
-          </a:prstGeom>
-          <a:noFill/>
-        </p:spPr>
-        <p:txBody>
-          <a:bodyPr wrap="none" rtlCol="0">
-            <a:spAutoFit/>
-          </a:bodyPr>
-          <a:lstStyle/>
-          <a:p>
-            <a:r>
-              <a:rPr lang="pt-BR" sz="1400" dirty="0"/>
-              <a:t>CEA055 – Estatística e Probabilidade – Prof. Marcos Goulart Lima</a:t>
-            </a:r>
-          </a:p>
-        </p:txBody>
-      </p:sp>
-    </p:spTree>
-    <p:extLst>
-      <p:ext uri="{BB962C8B-B14F-4D97-AF65-F5344CB8AC3E}">
-        <p14:creationId xmlns:p14="http://schemas.microsoft.com/office/powerpoint/2010/main" val="2264850509"/>
-      </p:ext>
-    </p:extLst>
-  </p:cSld>
-  <p:clrMapOvr>
-    <a:masterClrMapping/>
-  </p:clrMapOvr>
-</p:sld>
-</file>
-
-<file path=ppt/slides/slide11.xml><?xml version="1.0" encoding="utf-8"?>
 <p:sld xmlns:a="http://schemas.openxmlformats.org/drawingml/2006/main" xmlns:r="http://schemas.openxmlformats.org/officeDocument/2006/relationships" xmlns:p="http://schemas.openxmlformats.org/presentationml/2006/main">
   <p:cSld>
     <p:spTree>
@@ -4825,7 +4392,7 @@
 </p:sld>
 </file>
 
-<file path=ppt/slides/slide12.xml><?xml version="1.0" encoding="utf-8"?>
+<file path=ppt/slides/slide11.xml><?xml version="1.0" encoding="utf-8"?>
 <p:sld xmlns:a="http://schemas.openxmlformats.org/drawingml/2006/main" xmlns:r="http://schemas.openxmlformats.org/officeDocument/2006/relationships" xmlns:p="http://schemas.openxmlformats.org/presentationml/2006/main">
   <p:cSld>
     <p:spTree>
@@ -4970,7 +4537,31 @@
                       <a:rPr lang="pt-BR" sz="2400" i="1" dirty="0" smtClean="0">
                         <a:latin typeface="Cambria Math" panose="02040503050406030204" pitchFamily="18" charset="0"/>
                       </a:rPr>
-                      <m:t>(8,4)=</m:t>
+                      <m:t>(</m:t>
+                    </m:r>
+                    <m:r>
+                      <a:rPr lang="pt-BR" sz="2400" i="1" dirty="0" smtClean="0">
+                        <a:latin typeface="Cambria Math" panose="02040503050406030204" pitchFamily="18" charset="0"/>
+                      </a:rPr>
+                      <m:t>8</m:t>
+                    </m:r>
+                    <m:r>
+                      <a:rPr lang="pt-BR" sz="2400" i="1" dirty="0" smtClean="0">
+                        <a:latin typeface="Cambria Math" panose="02040503050406030204" pitchFamily="18" charset="0"/>
+                      </a:rPr>
+                      <m:t>,</m:t>
+                    </m:r>
+                    <m:r>
+                      <a:rPr lang="pt-BR" sz="2400" i="1" dirty="0" smtClean="0">
+                        <a:latin typeface="Cambria Math" panose="02040503050406030204" pitchFamily="18" charset="0"/>
+                      </a:rPr>
+                      <m:t>4</m:t>
+                    </m:r>
+                    <m:r>
+                      <a:rPr lang="pt-BR" sz="2400" i="1" dirty="0" smtClean="0">
+                        <a:latin typeface="Cambria Math" panose="02040503050406030204" pitchFamily="18" charset="0"/>
+                      </a:rPr>
+                      <m:t>)=</m:t>
                     </m:r>
                     <m:f>
                       <m:fPr>
@@ -4985,7 +4576,13 @@
                           <a:rPr lang="pt-BR" sz="2400" i="1" dirty="0" smtClean="0">
                             <a:latin typeface="Cambria Math" panose="02040503050406030204" pitchFamily="18" charset="0"/>
                           </a:rPr>
-                          <m:t>8!</m:t>
+                          <m:t>8</m:t>
+                        </m:r>
+                        <m:r>
+                          <a:rPr lang="pt-BR" sz="2400" i="1" dirty="0" smtClean="0">
+                            <a:latin typeface="Cambria Math" panose="02040503050406030204" pitchFamily="18" charset="0"/>
+                          </a:rPr>
+                          <m:t>!</m:t>
                         </m:r>
                       </m:num>
                       <m:den>
@@ -5002,7 +4599,19 @@
                               <a:rPr lang="pt-BR" sz="2400" i="1" dirty="0" smtClean="0">
                                 <a:latin typeface="Cambria Math" panose="02040503050406030204" pitchFamily="18" charset="0"/>
                               </a:rPr>
-                              <m:t>8−4</m:t>
+                              <m:t>8</m:t>
+                            </m:r>
+                            <m:r>
+                              <a:rPr lang="pt-BR" sz="2400" i="1" dirty="0" smtClean="0">
+                                <a:latin typeface="Cambria Math" panose="02040503050406030204" pitchFamily="18" charset="0"/>
+                              </a:rPr>
+                              <m:t>−</m:t>
+                            </m:r>
+                            <m:r>
+                              <a:rPr lang="pt-BR" sz="2400" i="1" dirty="0" smtClean="0">
+                                <a:latin typeface="Cambria Math" panose="02040503050406030204" pitchFamily="18" charset="0"/>
+                              </a:rPr>
+                              <m:t>4</m:t>
                             </m:r>
                           </m:e>
                         </m:d>
@@ -5018,7 +4627,73 @@
                       <a:rPr lang="pt-BR" sz="2400" i="1" dirty="0" smtClean="0">
                         <a:latin typeface="Cambria Math" panose="02040503050406030204" pitchFamily="18" charset="0"/>
                       </a:rPr>
-                      <m:t>=8×7 × 6 × 5=1.680</m:t>
+                      <m:t>=</m:t>
+                    </m:r>
+                    <m:r>
+                      <a:rPr lang="pt-BR" sz="2400" i="1" dirty="0" smtClean="0">
+                        <a:latin typeface="Cambria Math" panose="02040503050406030204" pitchFamily="18" charset="0"/>
+                      </a:rPr>
+                      <m:t>8</m:t>
+                    </m:r>
+                    <m:r>
+                      <a:rPr lang="pt-BR" sz="2400" i="1" dirty="0" smtClean="0">
+                        <a:latin typeface="Cambria Math" panose="02040503050406030204" pitchFamily="18" charset="0"/>
+                      </a:rPr>
+                      <m:t>×</m:t>
+                    </m:r>
+                    <m:r>
+                      <a:rPr lang="pt-BR" sz="2400" i="1" dirty="0" smtClean="0">
+                        <a:latin typeface="Cambria Math" panose="02040503050406030204" pitchFamily="18" charset="0"/>
+                      </a:rPr>
+                      <m:t>7</m:t>
+                    </m:r>
+                    <m:r>
+                      <a:rPr lang="pt-BR" sz="2400" i="1" dirty="0" smtClean="0">
+                        <a:latin typeface="Cambria Math" panose="02040503050406030204" pitchFamily="18" charset="0"/>
+                      </a:rPr>
+                      <m:t> × </m:t>
+                    </m:r>
+                    <m:r>
+                      <a:rPr lang="pt-BR" sz="2400" i="1" dirty="0" smtClean="0">
+                        <a:latin typeface="Cambria Math" panose="02040503050406030204" pitchFamily="18" charset="0"/>
+                      </a:rPr>
+                      <m:t>6</m:t>
+                    </m:r>
+                    <m:r>
+                      <a:rPr lang="pt-BR" sz="2400" i="1" dirty="0" smtClean="0">
+                        <a:latin typeface="Cambria Math" panose="02040503050406030204" pitchFamily="18" charset="0"/>
+                      </a:rPr>
+                      <m:t> × </m:t>
+                    </m:r>
+                    <m:r>
+                      <a:rPr lang="pt-BR" sz="2400" i="1" dirty="0" smtClean="0">
+                        <a:latin typeface="Cambria Math" panose="02040503050406030204" pitchFamily="18" charset="0"/>
+                      </a:rPr>
+                      <m:t>5</m:t>
+                    </m:r>
+                    <m:r>
+                      <a:rPr lang="pt-BR" sz="2400" i="1" dirty="0" smtClean="0">
+                        <a:latin typeface="Cambria Math" panose="02040503050406030204" pitchFamily="18" charset="0"/>
+                      </a:rPr>
+                      <m:t>=</m:t>
+                    </m:r>
+                    <m:r>
+                      <a:rPr lang="pt-BR" sz="2400" i="1" dirty="0" smtClean="0">
+                        <a:latin typeface="Cambria Math" panose="02040503050406030204" pitchFamily="18" charset="0"/>
+                      </a:rPr>
+                      <m:t>1</m:t>
+                    </m:r>
+                    <m:r>
+                      <a:rPr lang="pt-BR" sz="2400" i="1" dirty="0" smtClean="0">
+                        <a:latin typeface="Cambria Math" panose="02040503050406030204" pitchFamily="18" charset="0"/>
+                      </a:rPr>
+                      <m:t>.</m:t>
+                    </m:r>
+                    <m:r>
+                      <a:rPr lang="pt-BR" sz="2400" i="1" dirty="0" smtClean="0">
+                        <a:latin typeface="Cambria Math" panose="02040503050406030204" pitchFamily="18" charset="0"/>
+                      </a:rPr>
+                      <m:t>680</m:t>
                     </m:r>
                   </m:oMath>
                 </a14:m>
@@ -5123,7 +4798,7 @@
 </p:sld>
 </file>
 
-<file path=ppt/slides/slide13.xml><?xml version="1.0" encoding="utf-8"?>
+<file path=ppt/slides/slide12.xml><?xml version="1.0" encoding="utf-8"?>
 <p:sld xmlns:a="http://schemas.openxmlformats.org/drawingml/2006/main" xmlns:r="http://schemas.openxmlformats.org/officeDocument/2006/relationships" xmlns:p="http://schemas.openxmlformats.org/presentationml/2006/main">
   <p:cSld>
     <p:spTree>
@@ -5478,7 +5153,7 @@
 </p:sld>
 </file>
 
-<file path=ppt/slides/slide14.xml><?xml version="1.0" encoding="utf-8"?>
+<file path=ppt/slides/slide13.xml><?xml version="1.0" encoding="utf-8"?>
 <p:sld xmlns:a="http://schemas.openxmlformats.org/drawingml/2006/main" xmlns:r="http://schemas.openxmlformats.org/officeDocument/2006/relationships" xmlns:p="http://schemas.openxmlformats.org/presentationml/2006/main">
   <p:cSld>
     <p:spTree>
@@ -5583,7 +5258,31 @@
                       <a:rPr lang="pt-BR" sz="2400" i="1" dirty="0" smtClean="0">
                         <a:latin typeface="Cambria Math" panose="02040503050406030204" pitchFamily="18" charset="0"/>
                       </a:rPr>
-                      <m:t>(8,4)=</m:t>
+                      <m:t>(</m:t>
+                    </m:r>
+                    <m:r>
+                      <a:rPr lang="pt-BR" sz="2400" i="1" dirty="0" smtClean="0">
+                        <a:latin typeface="Cambria Math" panose="02040503050406030204" pitchFamily="18" charset="0"/>
+                      </a:rPr>
+                      <m:t>8</m:t>
+                    </m:r>
+                    <m:r>
+                      <a:rPr lang="pt-BR" sz="2400" i="1" dirty="0" smtClean="0">
+                        <a:latin typeface="Cambria Math" panose="02040503050406030204" pitchFamily="18" charset="0"/>
+                      </a:rPr>
+                      <m:t>,</m:t>
+                    </m:r>
+                    <m:r>
+                      <a:rPr lang="pt-BR" sz="2400" i="1" dirty="0" smtClean="0">
+                        <a:latin typeface="Cambria Math" panose="02040503050406030204" pitchFamily="18" charset="0"/>
+                      </a:rPr>
+                      <m:t>4</m:t>
+                    </m:r>
+                    <m:r>
+                      <a:rPr lang="pt-BR" sz="2400" i="1" dirty="0" smtClean="0">
+                        <a:latin typeface="Cambria Math" panose="02040503050406030204" pitchFamily="18" charset="0"/>
+                      </a:rPr>
+                      <m:t>)=</m:t>
                     </m:r>
                     <m:f>
                       <m:fPr>
@@ -5598,7 +5297,13 @@
                           <a:rPr lang="pt-BR" sz="2400" i="1" dirty="0" smtClean="0">
                             <a:latin typeface="Cambria Math" panose="02040503050406030204" pitchFamily="18" charset="0"/>
                           </a:rPr>
-                          <m:t>8!</m:t>
+                          <m:t>8</m:t>
+                        </m:r>
+                        <m:r>
+                          <a:rPr lang="pt-BR" sz="2400" i="1" dirty="0" smtClean="0">
+                            <a:latin typeface="Cambria Math" panose="02040503050406030204" pitchFamily="18" charset="0"/>
+                          </a:rPr>
+                          <m:t>!</m:t>
                         </m:r>
                       </m:num>
                       <m:den>
@@ -5606,7 +5311,25 @@
                           <a:rPr lang="pt-BR" sz="2400" i="1" dirty="0" smtClean="0">
                             <a:latin typeface="Cambria Math" panose="02040503050406030204" pitchFamily="18" charset="0"/>
                           </a:rPr>
-                          <m:t>4!·4!</m:t>
+                          <m:t>4</m:t>
+                        </m:r>
+                        <m:r>
+                          <a:rPr lang="pt-BR" sz="2400" i="1" dirty="0" smtClean="0">
+                            <a:latin typeface="Cambria Math" panose="02040503050406030204" pitchFamily="18" charset="0"/>
+                          </a:rPr>
+                          <m:t>!·</m:t>
+                        </m:r>
+                        <m:r>
+                          <a:rPr lang="pt-BR" sz="2400" i="1" dirty="0" smtClean="0">
+                            <a:latin typeface="Cambria Math" panose="02040503050406030204" pitchFamily="18" charset="0"/>
+                          </a:rPr>
+                          <m:t>4</m:t>
+                        </m:r>
+                        <m:r>
+                          <a:rPr lang="pt-BR" sz="2400" i="1" dirty="0" smtClean="0">
+                            <a:latin typeface="Cambria Math" panose="02040503050406030204" pitchFamily="18" charset="0"/>
+                          </a:rPr>
+                          <m:t>!</m:t>
                         </m:r>
                       </m:den>
                     </m:f>
@@ -5614,7 +5337,19 @@
                       <a:rPr lang="pt-BR" sz="2400" i="1" dirty="0" smtClean="0">
                         <a:latin typeface="Cambria Math" panose="02040503050406030204" pitchFamily="18" charset="0"/>
                       </a:rPr>
-                      <m:t>= 70 </m:t>
+                      <m:t>= </m:t>
+                    </m:r>
+                    <m:r>
+                      <a:rPr lang="pt-BR" sz="2400" i="1" dirty="0" smtClean="0">
+                        <a:latin typeface="Cambria Math" panose="02040503050406030204" pitchFamily="18" charset="0"/>
+                      </a:rPr>
+                      <m:t>70</m:t>
+                    </m:r>
+                    <m:r>
+                      <a:rPr lang="pt-BR" sz="2400" i="1" dirty="0" smtClean="0">
+                        <a:latin typeface="Cambria Math" panose="02040503050406030204" pitchFamily="18" charset="0"/>
+                      </a:rPr>
+                      <m:t> </m:t>
                     </m:r>
                   </m:oMath>
                 </a14:m>
@@ -5738,7 +5473,7 @@
 </p:sld>
 </file>
 
-<file path=ppt/slides/slide15.xml><?xml version="1.0" encoding="utf-8"?>
+<file path=ppt/slides/slide14.xml><?xml version="1.0" encoding="utf-8"?>
 <p:sld xmlns:a="http://schemas.openxmlformats.org/drawingml/2006/main" xmlns:r="http://schemas.openxmlformats.org/officeDocument/2006/relationships" xmlns:p="http://schemas.openxmlformats.org/presentationml/2006/main">
   <p:cSld>
     <p:spTree>
@@ -5847,7 +5582,7 @@
 </p:sld>
 </file>
 
-<file path=ppt/slides/slide16.xml><?xml version="1.0" encoding="utf-8"?>
+<file path=ppt/slides/slide15.xml><?xml version="1.0" encoding="utf-8"?>
 <p:sld xmlns:a="http://schemas.openxmlformats.org/drawingml/2006/main" xmlns:r="http://schemas.openxmlformats.org/officeDocument/2006/relationships" xmlns:p="http://schemas.openxmlformats.org/presentationml/2006/main">
   <p:cSld>
     <p:spTree>
@@ -6234,7 +5969,7 @@
 </p:sld>
 </file>
 
-<file path=ppt/slides/slide18.xml><?xml version="1.0" encoding="utf-8"?>
+<file path=ppt/slides/slide16.xml><?xml version="1.0" encoding="utf-8"?>
 <p:sld xmlns:a="http://schemas.openxmlformats.org/drawingml/2006/main" xmlns:r="http://schemas.openxmlformats.org/officeDocument/2006/relationships" xmlns:p="http://schemas.openxmlformats.org/presentationml/2006/main">
   <p:cSld>
     <p:spTree>
@@ -6634,129 +6369,7 @@
 </p:sld>
 </file>
 
-<file path=ppt/slides/slide2.xml><?xml version="1.0" encoding="utf-8"?>
-<p:sld xmlns:a="http://schemas.openxmlformats.org/drawingml/2006/main" xmlns:r="http://schemas.openxmlformats.org/officeDocument/2006/relationships" xmlns:p="http://schemas.openxmlformats.org/presentationml/2006/main">
-  <p:cSld>
-    <p:spTree>
-      <p:nvGrpSpPr>
-        <p:cNvPr id="1" name=""/>
-        <p:cNvGrpSpPr/>
-        <p:nvPr/>
-      </p:nvGrpSpPr>
-      <p:grpSpPr>
-        <a:xfrm>
-          <a:off x="0" y="0"/>
-          <a:ext cx="0" cy="0"/>
-          <a:chOff x="0" y="0"/>
-          <a:chExt cx="0" cy="0"/>
-        </a:xfrm>
-      </p:grpSpPr>
-      <p:sp>
-        <p:nvSpPr>
-          <p:cNvPr id="6" name="CaixaDeTexto 5">
-            <a:extLst>
-              <a:ext uri="{FF2B5EF4-FFF2-40B4-BE49-F238E27FC236}">
-                <a16:creationId xmlns:a16="http://schemas.microsoft.com/office/drawing/2014/main" id="{720B10DA-C761-4DEE-8D86-E170E1C2E981}"/>
-              </a:ext>
-            </a:extLst>
-          </p:cNvPr>
-          <p:cNvSpPr txBox="1"/>
-          <p:nvPr/>
-        </p:nvSpPr>
-        <p:spPr>
-          <a:xfrm>
-            <a:off x="623269" y="671347"/>
-            <a:ext cx="10748061" cy="2826287"/>
-          </a:xfrm>
-          <a:prstGeom prst="rect">
-            <a:avLst/>
-          </a:prstGeom>
-          <a:noFill/>
-        </p:spPr>
-        <p:txBody>
-          <a:bodyPr wrap="square" rtlCol="0">
-            <a:spAutoFit/>
-          </a:bodyPr>
-          <a:lstStyle/>
-          <a:p>
-            <a:r>
-              <a:rPr lang="pt-BR" sz="2800" b="1" dirty="0"/>
-              <a:t>Eventos equiprováveis (revisando)</a:t>
-            </a:r>
-          </a:p>
-          <a:p>
-            <a:endParaRPr lang="pt-BR" sz="2800" b="1" dirty="0"/>
-          </a:p>
-          <a:p>
-            <a:pPr>
-              <a:lnSpc>
-                <a:spcPct val="150000"/>
-              </a:lnSpc>
-            </a:pPr>
-            <a:r>
-              <a:rPr lang="pt-BR" sz="2800" dirty="0"/>
-              <a:t>Se todos os n pontos de um espaço amostral são igualmente prováveis (equiprováveis), cada um tem probabilidade 1/n. Um evento A com K desses pontos tem </a:t>
-            </a:r>
-            <a:r>
-              <a:rPr lang="pt-BR" sz="2800" b="1" dirty="0"/>
-              <a:t>P(A) = K/n</a:t>
-            </a:r>
-            <a:r>
-              <a:rPr lang="pt-BR" sz="2800" dirty="0"/>
-              <a:t>.</a:t>
-            </a:r>
-          </a:p>
-        </p:txBody>
-      </p:sp>
-      <p:sp>
-        <p:nvSpPr>
-          <p:cNvPr id="3" name="CaixaDeTexto 2">
-            <a:extLst>
-              <a:ext uri="{FF2B5EF4-FFF2-40B4-BE49-F238E27FC236}">
-                <a16:creationId xmlns:a16="http://schemas.microsoft.com/office/drawing/2014/main" id="{19131A04-B5D6-4211-8B49-4615DE5797E9}"/>
-              </a:ext>
-            </a:extLst>
-          </p:cNvPr>
-          <p:cNvSpPr txBox="1"/>
-          <p:nvPr/>
-        </p:nvSpPr>
-        <p:spPr>
-          <a:xfrm>
-            <a:off x="361188" y="6463893"/>
-            <a:ext cx="7772400" cy="308152"/>
-          </a:xfrm>
-          <a:prstGeom prst="rect">
-            <a:avLst/>
-          </a:prstGeom>
-          <a:noFill/>
-        </p:spPr>
-        <p:txBody>
-          <a:bodyPr wrap="none" rtlCol="0">
-            <a:spAutoFit/>
-          </a:bodyPr>
-          <a:lstStyle/>
-          <a:p>
-            <a:r>
-              <a:rPr lang="pt-BR" sz="1400" dirty="0"/>
-              <a:t>CEA055 – Estatística e Probabilidade – Prof. Marcos Goulart Lima</a:t>
-            </a:r>
-          </a:p>
-        </p:txBody>
-      </p:sp>
-    </p:spTree>
-    <p:extLst>
-      <p:ext uri="{BB962C8B-B14F-4D97-AF65-F5344CB8AC3E}">
-        <p14:creationId xmlns:p14="http://schemas.microsoft.com/office/powerpoint/2010/main" val="3132394824"/>
-      </p:ext>
-    </p:extLst>
-  </p:cSld>
-  <p:clrMapOvr>
-    <a:masterClrMapping/>
-  </p:clrMapOvr>
-</p:sld>
-</file>
-
-<file path=ppt/slides/slide20.xml><?xml version="1.0" encoding="utf-8"?>
+<file path=ppt/slides/slide17.xml><?xml version="1.0" encoding="utf-8"?>
 <p:sld xmlns:a="http://schemas.openxmlformats.org/drawingml/2006/main" xmlns:r="http://schemas.openxmlformats.org/officeDocument/2006/relationships" xmlns:p="http://schemas.openxmlformats.org/presentationml/2006/main">
   <p:cSld>
     <p:spTree>
@@ -6926,7 +6539,7 @@
 </p:sld>
 </file>
 
-<file path=ppt/slides/slide21.xml><?xml version="1.0" encoding="utf-8"?>
+<file path=ppt/slides/slide18.xml><?xml version="1.0" encoding="utf-8"?>
 <p:sld xmlns:a="http://schemas.openxmlformats.org/drawingml/2006/main" xmlns:r="http://schemas.openxmlformats.org/officeDocument/2006/relationships" xmlns:p="http://schemas.openxmlformats.org/presentationml/2006/main">
   <p:cSld>
     <p:spTree>
@@ -7065,7 +6678,13 @@
                       <a:rPr lang="pt-BR" sz="2800" i="1" dirty="0" smtClean="0">
                         <a:latin typeface="Cambria Math" panose="02040503050406030204" pitchFamily="18" charset="0"/>
                       </a:rPr>
-                      <m:t>₁+…+</m:t>
+                      <m:t>₁</m:t>
+                    </m:r>
+                    <m:r>
+                      <a:rPr lang="pt-BR" sz="2800" i="1" dirty="0" smtClean="0">
+                        <a:latin typeface="Cambria Math" panose="02040503050406030204" pitchFamily="18" charset="0"/>
+                      </a:rPr>
+                      <m:t>+…+</m:t>
                     </m:r>
                     <m:r>
                       <a:rPr lang="pt-BR" sz="2800" i="1" dirty="0" smtClean="0">
@@ -7468,7 +7087,7 @@
 </p:sld>
 </file>
 
-<file path=ppt/slides/slide22.xml><?xml version="1.0" encoding="utf-8"?>
+<file path=ppt/slides/slide19.xml><?xml version="1.0" encoding="utf-8"?>
 <p:sld xmlns:a="http://schemas.openxmlformats.org/drawingml/2006/main" xmlns:r="http://schemas.openxmlformats.org/officeDocument/2006/relationships" xmlns:p="http://schemas.openxmlformats.org/presentationml/2006/main">
   <p:cSld>
     <p:spTree>
@@ -7589,7 +7208,13 @@
                           <a:rPr lang="pt-BR" sz="2400" i="1" dirty="0" smtClean="0">
                             <a:latin typeface="Cambria Math" panose="02040503050406030204" pitchFamily="18" charset="0"/>
                           </a:rPr>
-                          <m:t>6!</m:t>
+                          <m:t>6</m:t>
+                        </m:r>
+                        <m:r>
+                          <a:rPr lang="pt-BR" sz="2400" i="1" dirty="0" smtClean="0">
+                            <a:latin typeface="Cambria Math" panose="02040503050406030204" pitchFamily="18" charset="0"/>
+                          </a:rPr>
+                          <m:t>!</m:t>
                         </m:r>
                       </m:num>
                       <m:den>
@@ -7597,7 +7222,37 @@
                           <a:rPr lang="pt-BR" sz="2400" i="1" dirty="0" smtClean="0">
                             <a:latin typeface="Cambria Math" panose="02040503050406030204" pitchFamily="18" charset="0"/>
                           </a:rPr>
-                          <m:t>3!·2!·1!</m:t>
+                          <m:t>3</m:t>
+                        </m:r>
+                        <m:r>
+                          <a:rPr lang="pt-BR" sz="2400" i="1" dirty="0" smtClean="0">
+                            <a:latin typeface="Cambria Math" panose="02040503050406030204" pitchFamily="18" charset="0"/>
+                          </a:rPr>
+                          <m:t>!·</m:t>
+                        </m:r>
+                        <m:r>
+                          <a:rPr lang="pt-BR" sz="2400" i="1" dirty="0" smtClean="0">
+                            <a:latin typeface="Cambria Math" panose="02040503050406030204" pitchFamily="18" charset="0"/>
+                          </a:rPr>
+                          <m:t>2</m:t>
+                        </m:r>
+                        <m:r>
+                          <a:rPr lang="pt-BR" sz="2400" i="1" dirty="0" smtClean="0">
+                            <a:latin typeface="Cambria Math" panose="02040503050406030204" pitchFamily="18" charset="0"/>
+                          </a:rPr>
+                          <m:t>!·</m:t>
+                        </m:r>
+                        <m:r>
+                          <a:rPr lang="pt-BR" sz="2400" i="1" dirty="0" smtClean="0">
+                            <a:latin typeface="Cambria Math" panose="02040503050406030204" pitchFamily="18" charset="0"/>
+                          </a:rPr>
+                          <m:t>1</m:t>
+                        </m:r>
+                        <m:r>
+                          <a:rPr lang="pt-BR" sz="2400" i="1" dirty="0" smtClean="0">
+                            <a:latin typeface="Cambria Math" panose="02040503050406030204" pitchFamily="18" charset="0"/>
+                          </a:rPr>
+                          <m:t>!</m:t>
                         </m:r>
                       </m:den>
                     </m:f>
@@ -7605,7 +7260,19 @@
                       <a:rPr lang="pt-BR" sz="2400" i="1" dirty="0" smtClean="0">
                         <a:latin typeface="Cambria Math" panose="02040503050406030204" pitchFamily="18" charset="0"/>
                       </a:rPr>
-                      <m:t>=60.</m:t>
+                      <m:t>=</m:t>
+                    </m:r>
+                    <m:r>
+                      <a:rPr lang="pt-BR" sz="2400" i="1" dirty="0" smtClean="0">
+                        <a:latin typeface="Cambria Math" panose="02040503050406030204" pitchFamily="18" charset="0"/>
+                      </a:rPr>
+                      <m:t>60</m:t>
+                    </m:r>
+                    <m:r>
+                      <a:rPr lang="pt-BR" sz="2400" i="1" dirty="0" smtClean="0">
+                        <a:latin typeface="Cambria Math" panose="02040503050406030204" pitchFamily="18" charset="0"/>
+                      </a:rPr>
+                      <m:t>.</m:t>
                     </m:r>
                   </m:oMath>
                 </a14:m>
@@ -7730,8 +7397,8 @@
 </p:sld>
 </file>
 
-<file path=ppt/slides/slide24.xml><?xml version="1.0" encoding="utf-8"?>
-<p:sld xmlns:a="http://schemas.openxmlformats.org/drawingml/2006/main" xmlns:p="http://schemas.openxmlformats.org/presentationml/2006/main" xmlns:r="http://schemas.openxmlformats.org/officeDocument/2006/relationships">
+<file path=ppt/slides/slide2.xml><?xml version="1.0" encoding="utf-8"?>
+<p:sld xmlns:a="http://schemas.openxmlformats.org/drawingml/2006/main" xmlns:r="http://schemas.openxmlformats.org/officeDocument/2006/relationships" xmlns:p="http://schemas.openxmlformats.org/presentationml/2006/main">
   <p:cSld>
     <p:spTree>
       <p:nvGrpSpPr>
@@ -7739,7 +7406,14 @@
         <p:cNvGrpSpPr/>
         <p:nvPr/>
       </p:nvGrpSpPr>
-      <p:grpSpPr/>
+      <p:grpSpPr>
+        <a:xfrm>
+          <a:off x="0" y="0"/>
+          <a:ext cx="0" cy="0"/>
+          <a:chOff x="0" y="0"/>
+          <a:chExt cx="0" cy="0"/>
+        </a:xfrm>
+      </p:grpSpPr>
       <p:sp>
         <p:nvSpPr>
           <p:cNvPr id="6" name="CaixaDeTexto 5">
@@ -7769,32 +7443,30 @@
           <a:lstStyle/>
           <a:p>
             <a:r>
-              <a:rPr b="1" sz="2800"/>
-              <a:t>Leitura recomendada:</a:t>
-            </a:r>
-          </a:p>
-          <a:p>
-            <a:r>
-              <a:rPr b="0" sz="2800"/>
-              <a:t>Bussab &amp; Morettin — Cap. 5 (5.2)</a:t>
-            </a:r>
-          </a:p>
-          <a:p>
-            <a:r>
-              <a:rPr b="0" sz="2800"/>
-              <a:t>Montgomery &amp; Runger — Cap. 2 (2.2)</a:t>
-            </a:r>
-          </a:p>
-          <a:p>
-            <a:r>
-              <a:rPr b="0" sz="2800"/>
-              <a:t>Magalhães &amp; Lima — Cap. 2 (2.1)</a:t>
-            </a:r>
-          </a:p>
-          <a:p>
-            <a:r>
-              <a:rPr b="0" sz="2800"/>
-              <a:t>Morettin — Cap. 2 (2.2, 2.3)</a:t>
+              <a:rPr lang="pt-BR" sz="2800" b="1" dirty="0"/>
+              <a:t>Eventos equiprováveis (revisando)</a:t>
+            </a:r>
+          </a:p>
+          <a:p>
+            <a:endParaRPr lang="pt-BR" sz="2800" b="1" dirty="0"/>
+          </a:p>
+          <a:p>
+            <a:pPr>
+              <a:lnSpc>
+                <a:spcPct val="150000"/>
+              </a:lnSpc>
+            </a:pPr>
+            <a:r>
+              <a:rPr lang="pt-BR" sz="2800" dirty="0"/>
+              <a:t>Se todos os n pontos de um espaço amostral são igualmente prováveis (equiprováveis), cada um tem probabilidade 1/n. Um evento A com K desses pontos tem </a:t>
+            </a:r>
+            <a:r>
+              <a:rPr lang="pt-BR" sz="2800" b="1" dirty="0"/>
+              <a:t>P(A) = K/n</a:t>
+            </a:r>
+            <a:r>
+              <a:rPr lang="pt-BR" sz="2800" dirty="0"/>
+              <a:t>.</a:t>
             </a:r>
           </a:p>
         </p:txBody>
@@ -7835,6 +7507,11 @@
         </p:txBody>
       </p:sp>
     </p:spTree>
+    <p:extLst>
+      <p:ext uri="{BB962C8B-B14F-4D97-AF65-F5344CB8AC3E}">
+        <p14:creationId xmlns:p14="http://schemas.microsoft.com/office/powerpoint/2010/main" val="3132394824"/>
+      </p:ext>
+    </p:extLst>
   </p:cSld>
   <p:clrMapOvr>
     <a:masterClrMapping/>
@@ -7842,8 +7519,8 @@
 </p:sld>
 </file>
 
-<file path=ppt/slides/slide25.xml><?xml version="1.0" encoding="utf-8"?>
-<p:sld xmlns:a="http://schemas.openxmlformats.org/drawingml/2006/main" xmlns:p="http://schemas.openxmlformats.org/presentationml/2006/main" xmlns:r="http://schemas.openxmlformats.org/officeDocument/2006/relationships">
+<file path=ppt/slides/slide20.xml><?xml version="1.0" encoding="utf-8"?>
+<p:sld xmlns:a="http://schemas.openxmlformats.org/drawingml/2006/main" xmlns:r="http://schemas.openxmlformats.org/officeDocument/2006/relationships" xmlns:p="http://schemas.openxmlformats.org/presentationml/2006/main">
   <p:cSld>
     <p:spTree>
       <p:nvGrpSpPr>
@@ -7851,7 +7528,14 @@
         <p:cNvGrpSpPr/>
         <p:nvPr/>
       </p:nvGrpSpPr>
-      <p:grpSpPr/>
+      <p:grpSpPr>
+        <a:xfrm>
+          <a:off x="0" y="0"/>
+          <a:ext cx="0" cy="0"/>
+          <a:chOff x="0" y="0"/>
+          <a:chExt cx="0" cy="0"/>
+        </a:xfrm>
+      </p:grpSpPr>
       <p:sp>
         <p:nvSpPr>
           <p:cNvPr id="6" name="CaixaDeTexto 5">
@@ -7881,25 +7565,144 @@
           <a:lstStyle/>
           <a:p>
             <a:r>
-              <a:rPr b="1" sz="2800"/>
+              <a:rPr sz="2800" b="1"/>
+              <a:t>Leitura recomendada:</a:t>
+            </a:r>
+          </a:p>
+          <a:p>
+            <a:r>
+              <a:rPr sz="2800" b="0"/>
+              <a:t>Bussab &amp; Morettin — Cap. 5 (5.2)</a:t>
+            </a:r>
+          </a:p>
+          <a:p>
+            <a:r>
+              <a:rPr sz="2800" b="0"/>
+              <a:t>Montgomery &amp; Runger — Cap. 2 (2.2)</a:t>
+            </a:r>
+          </a:p>
+          <a:p>
+            <a:r>
+              <a:rPr sz="2800" b="0"/>
+              <a:t>Magalhães &amp; Lima — Cap. 2 (2.1)</a:t>
+            </a:r>
+          </a:p>
+          <a:p>
+            <a:r>
+              <a:rPr sz="2800" b="0"/>
+              <a:t>Morettin — Cap. 2 (2.2, 2.3)</a:t>
+            </a:r>
+          </a:p>
+        </p:txBody>
+      </p:sp>
+      <p:sp>
+        <p:nvSpPr>
+          <p:cNvPr id="3" name="CaixaDeTexto 2">
+            <a:extLst>
+              <a:ext uri="{FF2B5EF4-FFF2-40B4-BE49-F238E27FC236}">
+                <a16:creationId xmlns:a16="http://schemas.microsoft.com/office/drawing/2014/main" id="{19131A04-B5D6-4211-8B49-4615DE5797E9}"/>
+              </a:ext>
+            </a:extLst>
+          </p:cNvPr>
+          <p:cNvSpPr txBox="1"/>
+          <p:nvPr/>
+        </p:nvSpPr>
+        <p:spPr>
+          <a:xfrm>
+            <a:off x="361188" y="6463893"/>
+            <a:ext cx="7772400" cy="308152"/>
+          </a:xfrm>
+          <a:prstGeom prst="rect">
+            <a:avLst/>
+          </a:prstGeom>
+          <a:noFill/>
+        </p:spPr>
+        <p:txBody>
+          <a:bodyPr wrap="none" rtlCol="0">
+            <a:spAutoFit/>
+          </a:bodyPr>
+          <a:lstStyle/>
+          <a:p>
+            <a:r>
+              <a:rPr lang="pt-BR" sz="1400" dirty="0"/>
+              <a:t>CEA055 – Estatística e Probabilidade – Prof. Marcos Goulart Lima</a:t>
+            </a:r>
+          </a:p>
+        </p:txBody>
+      </p:sp>
+    </p:spTree>
+  </p:cSld>
+  <p:clrMapOvr>
+    <a:masterClrMapping/>
+  </p:clrMapOvr>
+</p:sld>
+</file>
+
+<file path=ppt/slides/slide21.xml><?xml version="1.0" encoding="utf-8"?>
+<p:sld xmlns:a="http://schemas.openxmlformats.org/drawingml/2006/main" xmlns:r="http://schemas.openxmlformats.org/officeDocument/2006/relationships" xmlns:p="http://schemas.openxmlformats.org/presentationml/2006/main">
+  <p:cSld>
+    <p:spTree>
+      <p:nvGrpSpPr>
+        <p:cNvPr id="1" name=""/>
+        <p:cNvGrpSpPr/>
+        <p:nvPr/>
+      </p:nvGrpSpPr>
+      <p:grpSpPr>
+        <a:xfrm>
+          <a:off x="0" y="0"/>
+          <a:ext cx="0" cy="0"/>
+          <a:chOff x="0" y="0"/>
+          <a:chExt cx="0" cy="0"/>
+        </a:xfrm>
+      </p:grpSpPr>
+      <p:sp>
+        <p:nvSpPr>
+          <p:cNvPr id="6" name="CaixaDeTexto 5">
+            <a:extLst>
+              <a:ext uri="{FF2B5EF4-FFF2-40B4-BE49-F238E27FC236}">
+                <a16:creationId xmlns:a16="http://schemas.microsoft.com/office/drawing/2014/main" id="{720B10DA-C761-4DEE-8D86-E170E1C2E981}"/>
+              </a:ext>
+            </a:extLst>
+          </p:cNvPr>
+          <p:cNvSpPr txBox="1"/>
+          <p:nvPr/>
+        </p:nvSpPr>
+        <p:spPr>
+          <a:xfrm>
+            <a:off x="623269" y="671347"/>
+            <a:ext cx="10748061" cy="2826287"/>
+          </a:xfrm>
+          <a:prstGeom prst="rect">
+            <a:avLst/>
+          </a:prstGeom>
+          <a:noFill/>
+        </p:spPr>
+        <p:txBody>
+          <a:bodyPr wrap="square" rtlCol="0">
+            <a:spAutoFit/>
+          </a:bodyPr>
+          <a:lstStyle/>
+          <a:p>
+            <a:r>
+              <a:rPr sz="2800" b="1"/>
               <a:t>Exercícios recomendados:</a:t>
             </a:r>
           </a:p>
           <a:p>
             <a:r>
-              <a:rPr b="0" sz="2800"/>
+              <a:rPr sz="2800" b="0"/>
               <a:t>Bussab &amp; Morettin, Cap. 5: Problema 11</a:t>
             </a:r>
           </a:p>
           <a:p>
             <a:r>
-              <a:rPr b="0" sz="2800"/>
+              <a:rPr sz="2800" b="0"/>
               <a:t>Montgomery &amp; Runger, Cap. 2: Exercícios 2.2.3, 2.2.4, 2.2.5, 2.2.6, 2.2.7, 2.2.9, 2.2.10, 2.2.11, 2.2.12 e 2.2.14</a:t>
             </a:r>
           </a:p>
           <a:p>
             <a:r>
-              <a:rPr b="0" sz="2800"/>
+              <a:rPr sz="2800" b="0"/>
               <a:t>Morettin, Cap. 2: Exercícios 5, 6, 7, 8, 9, 10, 11, 12, 13 e 17</a:t>
             </a:r>
           </a:p>
@@ -8265,7 +8068,127 @@
                         <a:rPr lang="pt-BR" sz="2800" i="1" dirty="0" smtClean="0">
                           <a:latin typeface="Cambria Math" panose="02040503050406030204" pitchFamily="18" charset="0"/>
                         </a:rPr>
-                        <m:t>= 4/52 + 13/52 − 1/52 = 16/52 = 4/13.</m:t>
+                        <m:t>= </m:t>
+                      </m:r>
+                      <m:r>
+                        <a:rPr lang="pt-BR" sz="2800" i="1" dirty="0" smtClean="0">
+                          <a:latin typeface="Cambria Math" panose="02040503050406030204" pitchFamily="18" charset="0"/>
+                        </a:rPr>
+                        <m:t>4</m:t>
+                      </m:r>
+                      <m:r>
+                        <a:rPr lang="pt-BR" sz="2800" i="1" dirty="0" smtClean="0">
+                          <a:latin typeface="Cambria Math" panose="02040503050406030204" pitchFamily="18" charset="0"/>
+                        </a:rPr>
+                        <m:t>/</m:t>
+                      </m:r>
+                      <m:r>
+                        <a:rPr lang="pt-BR" sz="2800" i="1" dirty="0" smtClean="0">
+                          <a:latin typeface="Cambria Math" panose="02040503050406030204" pitchFamily="18" charset="0"/>
+                        </a:rPr>
+                        <m:t>52</m:t>
+                      </m:r>
+                      <m:r>
+                        <a:rPr lang="pt-BR" sz="2800" i="1" dirty="0" smtClean="0">
+                          <a:latin typeface="Cambria Math" panose="02040503050406030204" pitchFamily="18" charset="0"/>
+                        </a:rPr>
+                        <m:t> + </m:t>
+                      </m:r>
+                      <m:r>
+                        <a:rPr lang="pt-BR" sz="2800" i="1" dirty="0" smtClean="0">
+                          <a:latin typeface="Cambria Math" panose="02040503050406030204" pitchFamily="18" charset="0"/>
+                        </a:rPr>
+                        <m:t>13</m:t>
+                      </m:r>
+                      <m:r>
+                        <a:rPr lang="pt-BR" sz="2800" i="1" dirty="0" smtClean="0">
+                          <a:latin typeface="Cambria Math" panose="02040503050406030204" pitchFamily="18" charset="0"/>
+                        </a:rPr>
+                        <m:t>/</m:t>
+                      </m:r>
+                      <m:r>
+                        <a:rPr lang="pt-BR" sz="2800" i="1" dirty="0" smtClean="0">
+                          <a:latin typeface="Cambria Math" panose="02040503050406030204" pitchFamily="18" charset="0"/>
+                        </a:rPr>
+                        <m:t>52</m:t>
+                      </m:r>
+                      <m:r>
+                        <a:rPr lang="pt-BR" sz="2800" i="1" dirty="0" smtClean="0">
+                          <a:latin typeface="Cambria Math" panose="02040503050406030204" pitchFamily="18" charset="0"/>
+                        </a:rPr>
+                        <m:t> − </m:t>
+                      </m:r>
+                      <m:r>
+                        <a:rPr lang="pt-BR" sz="2800" i="1" dirty="0" smtClean="0">
+                          <a:latin typeface="Cambria Math" panose="02040503050406030204" pitchFamily="18" charset="0"/>
+                        </a:rPr>
+                        <m:t>1</m:t>
+                      </m:r>
+                      <m:r>
+                        <a:rPr lang="pt-BR" sz="2800" i="1" dirty="0" smtClean="0">
+                          <a:latin typeface="Cambria Math" panose="02040503050406030204" pitchFamily="18" charset="0"/>
+                        </a:rPr>
+                        <m:t>/</m:t>
+                      </m:r>
+                      <m:r>
+                        <a:rPr lang="pt-BR" sz="2800" i="1" dirty="0" smtClean="0">
+                          <a:latin typeface="Cambria Math" panose="02040503050406030204" pitchFamily="18" charset="0"/>
+                        </a:rPr>
+                        <m:t>52</m:t>
+                      </m:r>
+                      <m:r>
+                        <a:rPr lang="pt-BR" sz="2800" i="1" dirty="0" smtClean="0">
+                          <a:latin typeface="Cambria Math" panose="02040503050406030204" pitchFamily="18" charset="0"/>
+                        </a:rPr>
+                        <m:t> = </m:t>
+                      </m:r>
+                      <m:r>
+                        <a:rPr lang="pt-BR" sz="2800" i="1" dirty="0" smtClean="0">
+                          <a:latin typeface="Cambria Math" panose="02040503050406030204" pitchFamily="18" charset="0"/>
+                        </a:rPr>
+                        <m:t>16</m:t>
+                      </m:r>
+                      <m:r>
+                        <a:rPr lang="pt-BR" sz="2800" i="1" dirty="0" smtClean="0">
+                          <a:latin typeface="Cambria Math" panose="02040503050406030204" pitchFamily="18" charset="0"/>
+                        </a:rPr>
+                        <m:t>/</m:t>
+                      </m:r>
+                      <m:r>
+                        <a:rPr lang="pt-BR" sz="2800" i="1" dirty="0" smtClean="0">
+                          <a:latin typeface="Cambria Math" panose="02040503050406030204" pitchFamily="18" charset="0"/>
+                        </a:rPr>
+                        <m:t>52</m:t>
+                      </m:r>
+                      <m:r>
+                        <a:rPr lang="pt-BR" sz="2800" i="1" dirty="0" smtClean="0">
+                          <a:latin typeface="Cambria Math" panose="02040503050406030204" pitchFamily="18" charset="0"/>
+                        </a:rPr>
+                        <m:t> = </m:t>
+                      </m:r>
+                      <m:r>
+                        <a:rPr lang="pt-BR" sz="2800" i="1" dirty="0" smtClean="0">
+                          <a:latin typeface="Cambria Math" panose="02040503050406030204" pitchFamily="18" charset="0"/>
+                        </a:rPr>
+                        <m:t>4</m:t>
+                      </m:r>
+                      <m:r>
+                        <a:rPr lang="pt-BR" sz="2800" i="1" dirty="0" smtClean="0">
+                          <a:latin typeface="Cambria Math" panose="02040503050406030204" pitchFamily="18" charset="0"/>
+                        </a:rPr>
+                        <m:t>/</m:t>
+                      </m:r>
+                      <m:r>
+                        <a:rPr lang="pt-BR" sz="2800" i="1" dirty="0" smtClean="0">
+                          <a:latin typeface="Cambria Math" panose="02040503050406030204" pitchFamily="18" charset="0"/>
+                        </a:rPr>
+                        <m:t>13</m:t>
+                      </m:r>
+                      <m:r>
+                        <a:rPr lang="pt-BR" sz="2800" i="1" dirty="0" smtClean="0">
+                          <a:latin typeface="Cambria Math" panose="02040503050406030204" pitchFamily="18" charset="0"/>
+                        </a:rPr>
+                        <m:t>.</m:t>
                       </m:r>
                     </m:oMath>
                   </m:oMathPara>
@@ -8368,7 +8291,7 @@
 </p:sld>
 </file>
 
-<file path=ppt/slides/slide5.xml><?xml version="1.0" encoding="utf-8"?>
+<file path=ppt/slides/slide4.xml><?xml version="1.0" encoding="utf-8"?>
 <p:sld xmlns:a="http://schemas.openxmlformats.org/drawingml/2006/main" xmlns:r="http://schemas.openxmlformats.org/officeDocument/2006/relationships" xmlns:p="http://schemas.openxmlformats.org/presentationml/2006/main">
   <p:cSld>
     <p:spTree>
@@ -8700,7 +8623,7 @@
 </p:sld>
 </file>
 
-<file path=ppt/slides/slide6.xml><?xml version="1.0" encoding="utf-8"?>
+<file path=ppt/slides/slide5.xml><?xml version="1.0" encoding="utf-8"?>
 <p:sld xmlns:a="http://schemas.openxmlformats.org/drawingml/2006/main" xmlns:r="http://schemas.openxmlformats.org/officeDocument/2006/relationships" xmlns:p="http://schemas.openxmlformats.org/presentationml/2006/main">
   <p:cSld>
     <p:spTree>
@@ -8787,7 +8710,31 @@
                       <a:rPr lang="pt-BR" sz="2200" i="1" dirty="0" smtClean="0">
                         <a:latin typeface="Cambria Math" panose="02040503050406030204" pitchFamily="18" charset="0"/>
                       </a:rPr>
-                      <m:t>) = 11/18   </m:t>
+                      <m:t>) = </m:t>
+                    </m:r>
+                    <m:r>
+                      <a:rPr lang="pt-BR" sz="2200" i="1" dirty="0" smtClean="0">
+                        <a:latin typeface="Cambria Math" panose="02040503050406030204" pitchFamily="18" charset="0"/>
+                      </a:rPr>
+                      <m:t>11</m:t>
+                    </m:r>
+                    <m:r>
+                      <a:rPr lang="pt-BR" sz="2200" i="1" dirty="0" smtClean="0">
+                        <a:latin typeface="Cambria Math" panose="02040503050406030204" pitchFamily="18" charset="0"/>
+                      </a:rPr>
+                      <m:t>/</m:t>
+                    </m:r>
+                    <m:r>
+                      <a:rPr lang="pt-BR" sz="2200" i="1" dirty="0" smtClean="0">
+                        <a:latin typeface="Cambria Math" panose="02040503050406030204" pitchFamily="18" charset="0"/>
+                      </a:rPr>
+                      <m:t>18</m:t>
+                    </m:r>
+                    <m:r>
+                      <a:rPr lang="pt-BR" sz="2200" i="1" dirty="0" smtClean="0">
+                        <a:latin typeface="Cambria Math" panose="02040503050406030204" pitchFamily="18" charset="0"/>
+                      </a:rPr>
+                      <m:t>   </m:t>
                     </m:r>
                   </m:oMath>
                 </a14:m>
@@ -8826,7 +8773,31 @@
                       <a:rPr lang="pt-BR" sz="2200" i="1" dirty="0" smtClean="0">
                         <a:latin typeface="Cambria Math" panose="02040503050406030204" pitchFamily="18" charset="0"/>
                       </a:rPr>
-                      <m:t>) = 7/18    </m:t>
+                      <m:t>) = </m:t>
+                    </m:r>
+                    <m:r>
+                      <a:rPr lang="pt-BR" sz="2200" i="1" dirty="0" smtClean="0">
+                        <a:latin typeface="Cambria Math" panose="02040503050406030204" pitchFamily="18" charset="0"/>
+                      </a:rPr>
+                      <m:t>7</m:t>
+                    </m:r>
+                    <m:r>
+                      <a:rPr lang="pt-BR" sz="2200" i="1" dirty="0" smtClean="0">
+                        <a:latin typeface="Cambria Math" panose="02040503050406030204" pitchFamily="18" charset="0"/>
+                      </a:rPr>
+                      <m:t>/</m:t>
+                    </m:r>
+                    <m:r>
+                      <a:rPr lang="pt-BR" sz="2200" i="1" dirty="0" smtClean="0">
+                        <a:latin typeface="Cambria Math" panose="02040503050406030204" pitchFamily="18" charset="0"/>
+                      </a:rPr>
+                      <m:t>18</m:t>
+                    </m:r>
+                    <m:r>
+                      <a:rPr lang="pt-BR" sz="2200" i="1" dirty="0" smtClean="0">
+                        <a:latin typeface="Cambria Math" panose="02040503050406030204" pitchFamily="18" charset="0"/>
+                      </a:rPr>
+                      <m:t>    </m:t>
                     </m:r>
                   </m:oMath>
                 </a14:m>
@@ -8865,7 +8836,31 @@
                       <a:rPr lang="pt-BR" sz="2200" i="1" dirty="0" smtClean="0">
                         <a:latin typeface="Cambria Math" panose="02040503050406030204" pitchFamily="18" charset="0"/>
                       </a:rPr>
-                      <m:t>) = 9/18    </m:t>
+                      <m:t>) = </m:t>
+                    </m:r>
+                    <m:r>
+                      <a:rPr lang="pt-BR" sz="2200" i="1" dirty="0" smtClean="0">
+                        <a:latin typeface="Cambria Math" panose="02040503050406030204" pitchFamily="18" charset="0"/>
+                      </a:rPr>
+                      <m:t>9</m:t>
+                    </m:r>
+                    <m:r>
+                      <a:rPr lang="pt-BR" sz="2200" i="1" dirty="0" smtClean="0">
+                        <a:latin typeface="Cambria Math" panose="02040503050406030204" pitchFamily="18" charset="0"/>
+                      </a:rPr>
+                      <m:t>/</m:t>
+                    </m:r>
+                    <m:r>
+                      <a:rPr lang="pt-BR" sz="2200" i="1" dirty="0" smtClean="0">
+                        <a:latin typeface="Cambria Math" panose="02040503050406030204" pitchFamily="18" charset="0"/>
+                      </a:rPr>
+                      <m:t>18</m:t>
+                    </m:r>
+                    <m:r>
+                      <a:rPr lang="pt-BR" sz="2200" i="1" dirty="0" smtClean="0">
+                        <a:latin typeface="Cambria Math" panose="02040503050406030204" pitchFamily="18" charset="0"/>
+                      </a:rPr>
+                      <m:t>    </m:t>
                     </m:r>
                   </m:oMath>
                 </a14:m>
@@ -8904,7 +8899,31 @@
                       <a:rPr lang="pt-BR" sz="2200" i="1" dirty="0" smtClean="0">
                         <a:latin typeface="Cambria Math" panose="02040503050406030204" pitchFamily="18" charset="0"/>
                       </a:rPr>
-                      <m:t>) = 9/18    </m:t>
+                      <m:t>) = </m:t>
+                    </m:r>
+                    <m:r>
+                      <a:rPr lang="pt-BR" sz="2200" i="1" dirty="0" smtClean="0">
+                        <a:latin typeface="Cambria Math" panose="02040503050406030204" pitchFamily="18" charset="0"/>
+                      </a:rPr>
+                      <m:t>9</m:t>
+                    </m:r>
+                    <m:r>
+                      <a:rPr lang="pt-BR" sz="2200" i="1" dirty="0" smtClean="0">
+                        <a:latin typeface="Cambria Math" panose="02040503050406030204" pitchFamily="18" charset="0"/>
+                      </a:rPr>
+                      <m:t>/</m:t>
+                    </m:r>
+                    <m:r>
+                      <a:rPr lang="pt-BR" sz="2200" i="1" dirty="0" smtClean="0">
+                        <a:latin typeface="Cambria Math" panose="02040503050406030204" pitchFamily="18" charset="0"/>
+                      </a:rPr>
+                      <m:t>18</m:t>
+                    </m:r>
+                    <m:r>
+                      <a:rPr lang="pt-BR" sz="2200" i="1" dirty="0" smtClean="0">
+                        <a:latin typeface="Cambria Math" panose="02040503050406030204" pitchFamily="18" charset="0"/>
+                      </a:rPr>
+                      <m:t>    </m:t>
                     </m:r>
                   </m:oMath>
                 </a14:m>
@@ -8957,7 +8976,31 @@
                       <a:rPr lang="pt-BR" sz="2200" i="1" dirty="0" smtClean="0">
                         <a:latin typeface="Cambria Math" panose="02040503050406030204" pitchFamily="18" charset="0"/>
                       </a:rPr>
-                      <m:t>) = 3/18   </m:t>
+                      <m:t>) = </m:t>
+                    </m:r>
+                    <m:r>
+                      <a:rPr lang="pt-BR" sz="2200" i="1" dirty="0" smtClean="0">
+                        <a:latin typeface="Cambria Math" panose="02040503050406030204" pitchFamily="18" charset="0"/>
+                      </a:rPr>
+                      <m:t>3</m:t>
+                    </m:r>
+                    <m:r>
+                      <a:rPr lang="pt-BR" sz="2200" i="1" dirty="0" smtClean="0">
+                        <a:latin typeface="Cambria Math" panose="02040503050406030204" pitchFamily="18" charset="0"/>
+                      </a:rPr>
+                      <m:t>/</m:t>
+                    </m:r>
+                    <m:r>
+                      <a:rPr lang="pt-BR" sz="2200" i="1" dirty="0" smtClean="0">
+                        <a:latin typeface="Cambria Math" panose="02040503050406030204" pitchFamily="18" charset="0"/>
+                      </a:rPr>
+                      <m:t>18</m:t>
+                    </m:r>
+                    <m:r>
+                      <a:rPr lang="pt-BR" sz="2200" i="1" dirty="0" smtClean="0">
+                        <a:latin typeface="Cambria Math" panose="02040503050406030204" pitchFamily="18" charset="0"/>
+                      </a:rPr>
+                      <m:t>   </m:t>
                     </m:r>
                   </m:oMath>
                 </a14:m>
@@ -9094,7 +9137,103 @@
                       <a:rPr lang="pt-BR" sz="2200" i="1" dirty="0" smtClean="0">
                         <a:latin typeface="Cambria Math" panose="02040503050406030204" pitchFamily="18" charset="0"/>
                       </a:rPr>
-                      <m:t>) = 7/18 + 9/18 − 3/18 = 13/18.</m:t>
+                      <m:t>) = </m:t>
+                    </m:r>
+                    <m:r>
+                      <a:rPr lang="pt-BR" sz="2200" i="1" dirty="0" smtClean="0">
+                        <a:latin typeface="Cambria Math" panose="02040503050406030204" pitchFamily="18" charset="0"/>
+                      </a:rPr>
+                      <m:t>7</m:t>
+                    </m:r>
+                    <m:r>
+                      <a:rPr lang="pt-BR" sz="2200" i="1" dirty="0" smtClean="0">
+                        <a:latin typeface="Cambria Math" panose="02040503050406030204" pitchFamily="18" charset="0"/>
+                      </a:rPr>
+                      <m:t>/</m:t>
+                    </m:r>
+                    <m:r>
+                      <a:rPr lang="pt-BR" sz="2200" i="1" dirty="0" smtClean="0">
+                        <a:latin typeface="Cambria Math" panose="02040503050406030204" pitchFamily="18" charset="0"/>
+                      </a:rPr>
+                      <m:t>18</m:t>
+                    </m:r>
+                    <m:r>
+                      <a:rPr lang="pt-BR" sz="2200" i="1" dirty="0" smtClean="0">
+                        <a:latin typeface="Cambria Math" panose="02040503050406030204" pitchFamily="18" charset="0"/>
+                      </a:rPr>
+                      <m:t> + </m:t>
+                    </m:r>
+                    <m:r>
+                      <a:rPr lang="pt-BR" sz="2200" i="1" dirty="0" smtClean="0">
+                        <a:latin typeface="Cambria Math" panose="02040503050406030204" pitchFamily="18" charset="0"/>
+                      </a:rPr>
+                      <m:t>9</m:t>
+                    </m:r>
+                    <m:r>
+                      <a:rPr lang="pt-BR" sz="2200" i="1" dirty="0" smtClean="0">
+                        <a:latin typeface="Cambria Math" panose="02040503050406030204" pitchFamily="18" charset="0"/>
+                      </a:rPr>
+                      <m:t>/</m:t>
+                    </m:r>
+                    <m:r>
+                      <a:rPr lang="pt-BR" sz="2200" i="1" dirty="0" smtClean="0">
+                        <a:latin typeface="Cambria Math" panose="02040503050406030204" pitchFamily="18" charset="0"/>
+                      </a:rPr>
+                      <m:t>18</m:t>
+                    </m:r>
+                    <m:r>
+                      <a:rPr lang="pt-BR" sz="2200" i="1" dirty="0" smtClean="0">
+                        <a:latin typeface="Cambria Math" panose="02040503050406030204" pitchFamily="18" charset="0"/>
+                      </a:rPr>
+                      <m:t> − </m:t>
+                    </m:r>
+                    <m:r>
+                      <a:rPr lang="pt-BR" sz="2200" i="1" dirty="0" smtClean="0">
+                        <a:latin typeface="Cambria Math" panose="02040503050406030204" pitchFamily="18" charset="0"/>
+                      </a:rPr>
+                      <m:t>3</m:t>
+                    </m:r>
+                    <m:r>
+                      <a:rPr lang="pt-BR" sz="2200" i="1" dirty="0" smtClean="0">
+                        <a:latin typeface="Cambria Math" panose="02040503050406030204" pitchFamily="18" charset="0"/>
+                      </a:rPr>
+                      <m:t>/</m:t>
+                    </m:r>
+                    <m:r>
+                      <a:rPr lang="pt-BR" sz="2200" i="1" dirty="0" smtClean="0">
+                        <a:latin typeface="Cambria Math" panose="02040503050406030204" pitchFamily="18" charset="0"/>
+                      </a:rPr>
+                      <m:t>18</m:t>
+                    </m:r>
+                    <m:r>
+                      <a:rPr lang="pt-BR" sz="2200" i="1" dirty="0" smtClean="0">
+                        <a:latin typeface="Cambria Math" panose="02040503050406030204" pitchFamily="18" charset="0"/>
+                      </a:rPr>
+                      <m:t> = </m:t>
+                    </m:r>
+                    <m:r>
+                      <a:rPr lang="pt-BR" sz="2200" i="1" dirty="0" smtClean="0">
+                        <a:latin typeface="Cambria Math" panose="02040503050406030204" pitchFamily="18" charset="0"/>
+                      </a:rPr>
+                      <m:t>13</m:t>
+                    </m:r>
+                    <m:r>
+                      <a:rPr lang="pt-BR" sz="2200" i="1" dirty="0" smtClean="0">
+                        <a:latin typeface="Cambria Math" panose="02040503050406030204" pitchFamily="18" charset="0"/>
+                      </a:rPr>
+                      <m:t>/</m:t>
+                    </m:r>
+                    <m:r>
+                      <a:rPr lang="pt-BR" sz="2200" i="1" dirty="0" smtClean="0">
+                        <a:latin typeface="Cambria Math" panose="02040503050406030204" pitchFamily="18" charset="0"/>
+                      </a:rPr>
+                      <m:t>18</m:t>
+                    </m:r>
+                    <m:r>
+                      <a:rPr lang="pt-BR" sz="2200" i="1" dirty="0" smtClean="0">
+                        <a:latin typeface="Cambria Math" panose="02040503050406030204" pitchFamily="18" charset="0"/>
+                      </a:rPr>
+                      <m:t>.</m:t>
                     </m:r>
                   </m:oMath>
                 </a14:m>
@@ -9156,7 +9295,31 @@
                       <a:rPr lang="pt-BR" sz="2200" i="1" dirty="0" smtClean="0">
                         <a:latin typeface="Cambria Math" panose="02040503050406030204" pitchFamily="18" charset="0"/>
                       </a:rPr>
-                      <m:t>) = 5/18   (</m:t>
+                      <m:t>) = </m:t>
+                    </m:r>
+                    <m:r>
+                      <a:rPr lang="pt-BR" sz="2200" i="1" dirty="0" smtClean="0">
+                        <a:latin typeface="Cambria Math" panose="02040503050406030204" pitchFamily="18" charset="0"/>
+                      </a:rPr>
+                      <m:t>5</m:t>
+                    </m:r>
+                    <m:r>
+                      <a:rPr lang="pt-BR" sz="2200" i="1" dirty="0" smtClean="0">
+                        <a:latin typeface="Cambria Math" panose="02040503050406030204" pitchFamily="18" charset="0"/>
+                      </a:rPr>
+                      <m:t>/</m:t>
+                    </m:r>
+                    <m:r>
+                      <a:rPr lang="pt-BR" sz="2200" i="1" dirty="0" smtClean="0">
+                        <a:latin typeface="Cambria Math" panose="02040503050406030204" pitchFamily="18" charset="0"/>
+                      </a:rPr>
+                      <m:t>18</m:t>
+                    </m:r>
+                    <m:r>
+                      <a:rPr lang="pt-BR" sz="2200" i="1" dirty="0" smtClean="0">
+                        <a:latin typeface="Cambria Math" panose="02040503050406030204" pitchFamily="18" charset="0"/>
+                      </a:rPr>
+                      <m:t>   (</m:t>
                     </m:r>
                     <m:r>
                       <a:rPr lang="pt-BR" sz="2200" i="1" dirty="0" smtClean="0">
@@ -9168,7 +9331,19 @@
                       <a:rPr lang="pt-BR" sz="2200" i="1" dirty="0" smtClean="0">
                         <a:latin typeface="Cambria Math" panose="02040503050406030204" pitchFamily="18" charset="0"/>
                       </a:rPr>
-                      <m:t> &gt;21)</m:t>
+                      <m:t> &gt;</m:t>
+                    </m:r>
+                    <m:r>
+                      <a:rPr lang="pt-BR" sz="2200" i="1" dirty="0" smtClean="0">
+                        <a:latin typeface="Cambria Math" panose="02040503050406030204" pitchFamily="18" charset="0"/>
+                      </a:rPr>
+                      <m:t>21</m:t>
+                    </m:r>
+                    <m:r>
+                      <a:rPr lang="pt-BR" sz="2200" i="1" dirty="0" smtClean="0">
+                        <a:latin typeface="Cambria Math" panose="02040503050406030204" pitchFamily="18" charset="0"/>
+                      </a:rPr>
+                      <m:t>)</m:t>
                     </m:r>
                   </m:oMath>
                 </a14:m>
@@ -9302,7 +9477,127 @@
                       <a:rPr lang="pt-BR" sz="2200" i="1" dirty="0" smtClean="0">
                         <a:latin typeface="Cambria Math" panose="02040503050406030204" pitchFamily="18" charset="0"/>
                       </a:rPr>
-                      <m:t>) = 11/18 + 9/18 − 5/18 = 15/18 = 5/6.</m:t>
+                      <m:t>) = </m:t>
+                    </m:r>
+                    <m:r>
+                      <a:rPr lang="pt-BR" sz="2200" i="1" dirty="0" smtClean="0">
+                        <a:latin typeface="Cambria Math" panose="02040503050406030204" pitchFamily="18" charset="0"/>
+                      </a:rPr>
+                      <m:t>11</m:t>
+                    </m:r>
+                    <m:r>
+                      <a:rPr lang="pt-BR" sz="2200" i="1" dirty="0" smtClean="0">
+                        <a:latin typeface="Cambria Math" panose="02040503050406030204" pitchFamily="18" charset="0"/>
+                      </a:rPr>
+                      <m:t>/</m:t>
+                    </m:r>
+                    <m:r>
+                      <a:rPr lang="pt-BR" sz="2200" i="1" dirty="0" smtClean="0">
+                        <a:latin typeface="Cambria Math" panose="02040503050406030204" pitchFamily="18" charset="0"/>
+                      </a:rPr>
+                      <m:t>18</m:t>
+                    </m:r>
+                    <m:r>
+                      <a:rPr lang="pt-BR" sz="2200" i="1" dirty="0" smtClean="0">
+                        <a:latin typeface="Cambria Math" panose="02040503050406030204" pitchFamily="18" charset="0"/>
+                      </a:rPr>
+                      <m:t> + </m:t>
+                    </m:r>
+                    <m:r>
+                      <a:rPr lang="pt-BR" sz="2200" i="1" dirty="0" smtClean="0">
+                        <a:latin typeface="Cambria Math" panose="02040503050406030204" pitchFamily="18" charset="0"/>
+                      </a:rPr>
+                      <m:t>9</m:t>
+                    </m:r>
+                    <m:r>
+                      <a:rPr lang="pt-BR" sz="2200" i="1" dirty="0" smtClean="0">
+                        <a:latin typeface="Cambria Math" panose="02040503050406030204" pitchFamily="18" charset="0"/>
+                      </a:rPr>
+                      <m:t>/</m:t>
+                    </m:r>
+                    <m:r>
+                      <a:rPr lang="pt-BR" sz="2200" i="1" dirty="0" smtClean="0">
+                        <a:latin typeface="Cambria Math" panose="02040503050406030204" pitchFamily="18" charset="0"/>
+                      </a:rPr>
+                      <m:t>18</m:t>
+                    </m:r>
+                    <m:r>
+                      <a:rPr lang="pt-BR" sz="2200" i="1" dirty="0" smtClean="0">
+                        <a:latin typeface="Cambria Math" panose="02040503050406030204" pitchFamily="18" charset="0"/>
+                      </a:rPr>
+                      <m:t> − </m:t>
+                    </m:r>
+                    <m:r>
+                      <a:rPr lang="pt-BR" sz="2200" i="1" dirty="0" smtClean="0">
+                        <a:latin typeface="Cambria Math" panose="02040503050406030204" pitchFamily="18" charset="0"/>
+                      </a:rPr>
+                      <m:t>5</m:t>
+                    </m:r>
+                    <m:r>
+                      <a:rPr lang="pt-BR" sz="2200" i="1" dirty="0" smtClean="0">
+                        <a:latin typeface="Cambria Math" panose="02040503050406030204" pitchFamily="18" charset="0"/>
+                      </a:rPr>
+                      <m:t>/</m:t>
+                    </m:r>
+                    <m:r>
+                      <a:rPr lang="pt-BR" sz="2200" i="1" dirty="0" smtClean="0">
+                        <a:latin typeface="Cambria Math" panose="02040503050406030204" pitchFamily="18" charset="0"/>
+                      </a:rPr>
+                      <m:t>18</m:t>
+                    </m:r>
+                    <m:r>
+                      <a:rPr lang="pt-BR" sz="2200" i="1" dirty="0" smtClean="0">
+                        <a:latin typeface="Cambria Math" panose="02040503050406030204" pitchFamily="18" charset="0"/>
+                      </a:rPr>
+                      <m:t> = </m:t>
+                    </m:r>
+                    <m:r>
+                      <a:rPr lang="pt-BR" sz="2200" i="1" dirty="0" smtClean="0">
+                        <a:latin typeface="Cambria Math" panose="02040503050406030204" pitchFamily="18" charset="0"/>
+                      </a:rPr>
+                      <m:t>15</m:t>
+                    </m:r>
+                    <m:r>
+                      <a:rPr lang="pt-BR" sz="2200" i="1" dirty="0" smtClean="0">
+                        <a:latin typeface="Cambria Math" panose="02040503050406030204" pitchFamily="18" charset="0"/>
+                      </a:rPr>
+                      <m:t>/</m:t>
+                    </m:r>
+                    <m:r>
+                      <a:rPr lang="pt-BR" sz="2200" i="1" dirty="0" smtClean="0">
+                        <a:latin typeface="Cambria Math" panose="02040503050406030204" pitchFamily="18" charset="0"/>
+                      </a:rPr>
+                      <m:t>18</m:t>
+                    </m:r>
+                    <m:r>
+                      <a:rPr lang="pt-BR" sz="2200" i="1" dirty="0" smtClean="0">
+                        <a:latin typeface="Cambria Math" panose="02040503050406030204" pitchFamily="18" charset="0"/>
+                      </a:rPr>
+                      <m:t> = </m:t>
+                    </m:r>
+                    <m:r>
+                      <a:rPr lang="pt-BR" sz="2200" i="1" dirty="0" smtClean="0">
+                        <a:latin typeface="Cambria Math" panose="02040503050406030204" pitchFamily="18" charset="0"/>
+                      </a:rPr>
+                      <m:t>5</m:t>
+                    </m:r>
+                    <m:r>
+                      <a:rPr lang="pt-BR" sz="2200" i="1" dirty="0" smtClean="0">
+                        <a:latin typeface="Cambria Math" panose="02040503050406030204" pitchFamily="18" charset="0"/>
+                      </a:rPr>
+                      <m:t>/</m:t>
+                    </m:r>
+                    <m:r>
+                      <a:rPr lang="pt-BR" sz="2200" i="1" dirty="0" smtClean="0">
+                        <a:latin typeface="Cambria Math" panose="02040503050406030204" pitchFamily="18" charset="0"/>
+                      </a:rPr>
+                      <m:t>6</m:t>
+                    </m:r>
+                    <m:r>
+                      <a:rPr lang="pt-BR" sz="2200" i="1" dirty="0" smtClean="0">
+                        <a:latin typeface="Cambria Math" panose="02040503050406030204" pitchFamily="18" charset="0"/>
+                      </a:rPr>
+                      <m:t>.</m:t>
                     </m:r>
                   </m:oMath>
                 </a14:m>
@@ -9458,7 +9753,13 @@
                       <a:rPr lang="pt-BR" sz="2200" i="1" dirty="0" smtClean="0">
                         <a:latin typeface="Cambria Math" panose="02040503050406030204" pitchFamily="18" charset="0"/>
                       </a:rPr>
-                      <m:t>1 − </m:t>
+                      <m:t>1</m:t>
+                    </m:r>
+                    <m:r>
+                      <a:rPr lang="pt-BR" sz="2200" i="1" dirty="0" smtClean="0">
+                        <a:latin typeface="Cambria Math" panose="02040503050406030204" pitchFamily="18" charset="0"/>
+                      </a:rPr>
+                      <m:t> − </m:t>
                     </m:r>
                     <m:r>
                       <a:rPr lang="pt-BR" sz="2200" i="1" dirty="0" smtClean="0">
@@ -9494,7 +9795,61 @@
                       <a:rPr lang="pt-BR" sz="2200" i="1" dirty="0" smtClean="0">
                         <a:latin typeface="Cambria Math" panose="02040503050406030204" pitchFamily="18" charset="0"/>
                       </a:rPr>
-                      <m:t>) = 1 − 5/6 = 1/6</m:t>
+                      <m:t>) = </m:t>
+                    </m:r>
+                    <m:r>
+                      <a:rPr lang="pt-BR" sz="2200" i="1" dirty="0" smtClean="0">
+                        <a:latin typeface="Cambria Math" panose="02040503050406030204" pitchFamily="18" charset="0"/>
+                      </a:rPr>
+                      <m:t>1</m:t>
+                    </m:r>
+                    <m:r>
+                      <a:rPr lang="pt-BR" sz="2200" i="1" dirty="0" smtClean="0">
+                        <a:latin typeface="Cambria Math" panose="02040503050406030204" pitchFamily="18" charset="0"/>
+                      </a:rPr>
+                      <m:t> − </m:t>
+                    </m:r>
+                    <m:r>
+                      <a:rPr lang="pt-BR" sz="2200" i="1" dirty="0" smtClean="0">
+                        <a:latin typeface="Cambria Math" panose="02040503050406030204" pitchFamily="18" charset="0"/>
+                      </a:rPr>
+                      <m:t>5</m:t>
+                    </m:r>
+                    <m:r>
+                      <a:rPr lang="pt-BR" sz="2200" i="1" dirty="0" smtClean="0">
+                        <a:latin typeface="Cambria Math" panose="02040503050406030204" pitchFamily="18" charset="0"/>
+                      </a:rPr>
+                      <m:t>/</m:t>
+                    </m:r>
+                    <m:r>
+                      <a:rPr lang="pt-BR" sz="2200" i="1" dirty="0" smtClean="0">
+                        <a:latin typeface="Cambria Math" panose="02040503050406030204" pitchFamily="18" charset="0"/>
+                      </a:rPr>
+                      <m:t>6</m:t>
+                    </m:r>
+                    <m:r>
+                      <a:rPr lang="pt-BR" sz="2200" i="1" dirty="0" smtClean="0">
+                        <a:latin typeface="Cambria Math" panose="02040503050406030204" pitchFamily="18" charset="0"/>
+                      </a:rPr>
+                      <m:t> = </m:t>
+                    </m:r>
+                    <m:r>
+                      <a:rPr lang="pt-BR" sz="2200" i="1" dirty="0" smtClean="0">
+                        <a:latin typeface="Cambria Math" panose="02040503050406030204" pitchFamily="18" charset="0"/>
+                      </a:rPr>
+                      <m:t>1</m:t>
+                    </m:r>
+                    <m:r>
+                      <a:rPr lang="pt-BR" sz="2200" i="1" dirty="0" smtClean="0">
+                        <a:latin typeface="Cambria Math" panose="02040503050406030204" pitchFamily="18" charset="0"/>
+                      </a:rPr>
+                      <m:t>/</m:t>
+                    </m:r>
+                    <m:r>
+                      <a:rPr lang="pt-BR" sz="2200" i="1" dirty="0" smtClean="0">
+                        <a:latin typeface="Cambria Math" panose="02040503050406030204" pitchFamily="18" charset="0"/>
+                      </a:rPr>
+                      <m:t>6</m:t>
                     </m:r>
                   </m:oMath>
                 </a14:m>
@@ -9599,7 +9954,7 @@
 </p:sld>
 </file>
 
-<file path=ppt/slides/slide7.xml><?xml version="1.0" encoding="utf-8"?>
+<file path=ppt/slides/slide6.xml><?xml version="1.0" encoding="utf-8"?>
 <p:sld xmlns:a="http://schemas.openxmlformats.org/drawingml/2006/main" xmlns:r="http://schemas.openxmlformats.org/officeDocument/2006/relationships" xmlns:p="http://schemas.openxmlformats.org/presentationml/2006/main">
   <p:cSld>
     <p:spTree>
@@ -9790,6 +10145,289 @@
     <p:extLst>
       <p:ext uri="{BB962C8B-B14F-4D97-AF65-F5344CB8AC3E}">
         <p14:creationId xmlns:p14="http://schemas.microsoft.com/office/powerpoint/2010/main" val="152838159"/>
+      </p:ext>
+    </p:extLst>
+  </p:cSld>
+  <p:clrMapOvr>
+    <a:masterClrMapping/>
+  </p:clrMapOvr>
+</p:sld>
+</file>
+
+<file path=ppt/slides/slide7.xml><?xml version="1.0" encoding="utf-8"?>
+<p:sld xmlns:a="http://schemas.openxmlformats.org/drawingml/2006/main" xmlns:r="http://schemas.openxmlformats.org/officeDocument/2006/relationships" xmlns:p="http://schemas.openxmlformats.org/presentationml/2006/main">
+  <p:cSld>
+    <p:spTree>
+      <p:nvGrpSpPr>
+        <p:cNvPr id="1" name=""/>
+        <p:cNvGrpSpPr/>
+        <p:nvPr/>
+      </p:nvGrpSpPr>
+      <p:grpSpPr>
+        <a:xfrm>
+          <a:off x="0" y="0"/>
+          <a:ext cx="0" cy="0"/>
+          <a:chOff x="0" y="0"/>
+          <a:chExt cx="0" cy="0"/>
+        </a:xfrm>
+      </p:grpSpPr>
+      <mc:AlternateContent xmlns:mc="http://schemas.openxmlformats.org/markup-compatibility/2006" xmlns:a14="http://schemas.microsoft.com/office/drawing/2010/main">
+        <mc:Choice Requires="a14">
+          <p:sp>
+            <p:nvSpPr>
+              <p:cNvPr id="6" name="CaixaDeTexto 5">
+                <a:extLst>
+                  <a:ext uri="{FF2B5EF4-FFF2-40B4-BE49-F238E27FC236}">
+                    <a16:creationId xmlns:a16="http://schemas.microsoft.com/office/drawing/2014/main" id="{720B10DA-C761-4DEE-8D86-E170E1C2E981}"/>
+                  </a:ext>
+                </a:extLst>
+              </p:cNvPr>
+              <p:cNvSpPr txBox="1"/>
+              <p:nvPr/>
+            </p:nvSpPr>
+            <p:spPr>
+              <a:xfrm>
+                <a:off x="585596" y="661503"/>
+                <a:ext cx="10748061" cy="3903504"/>
+              </a:xfrm>
+              <a:prstGeom prst="rect">
+                <a:avLst/>
+              </a:prstGeom>
+              <a:noFill/>
+            </p:spPr>
+            <p:txBody>
+              <a:bodyPr wrap="square" rtlCol="0">
+                <a:spAutoFit/>
+              </a:bodyPr>
+              <a:lstStyle/>
+              <a:p>
+                <a:pPr>
+                  <a:lnSpc>
+                    <a:spcPct val="150000"/>
+                  </a:lnSpc>
+                </a:pPr>
+                <a:r>
+                  <a:rPr lang="pt-BR" sz="2800" b="1" dirty="0"/>
+                  <a:t>Princípio multiplicativo</a:t>
+                </a:r>
+              </a:p>
+              <a:p>
+                <a:pPr rtl="0">
+                  <a:lnSpc>
+                    <a:spcPct val="150000"/>
+                  </a:lnSpc>
+                </a:pPr>
+                <a:r>
+                  <a:rPr lang="pt-BR" sz="2800" dirty="0"/>
+                  <a:t>Se uma operação é feita em </a:t>
+                </a:r>
+                <a14:m>
+                  <m:oMath xmlns:m="http://schemas.openxmlformats.org/officeDocument/2006/math">
+                    <m:r>
+                      <a:rPr lang="pt-BR" sz="2800" b="1" i="1" dirty="0" smtClean="0">
+                        <a:latin typeface="Cambria Math" panose="02040503050406030204" pitchFamily="18" charset="0"/>
+                      </a:rPr>
+                      <m:t>𝒌</m:t>
+                    </m:r>
+                  </m:oMath>
+                </a14:m>
+                <a:r>
+                  <a:rPr lang="pt-BR" sz="2800" dirty="0"/>
+                  <a:t> etapas, e a etapa i pode ser realizada de </a:t>
+                </a:r>
+                <a14:m>
+                  <m:oMath xmlns:m="http://schemas.openxmlformats.org/officeDocument/2006/math">
+                    <m:r>
+                      <a:rPr lang="pt-BR" sz="2800" b="1" i="1" dirty="0" smtClean="0">
+                        <a:latin typeface="Cambria Math" panose="02040503050406030204" pitchFamily="18" charset="0"/>
+                      </a:rPr>
+                      <m:t>𝒏</m:t>
+                    </m:r>
+                    <m:r>
+                      <a:rPr lang="pt-BR" sz="2800" b="1" i="1" dirty="0" smtClean="0">
+                        <a:latin typeface="Cambria Math" panose="02040503050406030204" pitchFamily="18" charset="0"/>
+                      </a:rPr>
+                      <m:t>ᵢ</m:t>
+                    </m:r>
+                  </m:oMath>
+                </a14:m>
+                <a:r>
+                  <a:rPr lang="pt-BR" sz="2800" dirty="0"/>
+                  <a:t> maneiras, o total de maneiras de completar a operação é</a:t>
+                </a:r>
+              </a:p>
+              <a:p>
+                <a:pPr algn="ctr" rtl="0">
+                  <a:lnSpc>
+                    <a:spcPct val="150000"/>
+                  </a:lnSpc>
+                </a:pPr>
+                <a:r>
+                  <a:rPr lang="pt-BR" sz="2800" dirty="0"/>
+                  <a:t> </a:t>
+                </a:r>
+                <a14:m>
+                  <m:oMath xmlns:m="http://schemas.openxmlformats.org/officeDocument/2006/math">
+                    <m:r>
+                      <a:rPr lang="pt-BR" sz="2800" b="1" i="1" dirty="0" smtClean="0">
+                        <a:latin typeface="Cambria Math" panose="02040503050406030204" pitchFamily="18" charset="0"/>
+                      </a:rPr>
+                      <m:t>𝒏</m:t>
+                    </m:r>
+                    <m:r>
+                      <a:rPr lang="pt-BR" sz="2800" b="1" i="1" dirty="0" smtClean="0">
+                        <a:latin typeface="Cambria Math" panose="02040503050406030204" pitchFamily="18" charset="0"/>
+                      </a:rPr>
+                      <m:t>₁ × </m:t>
+                    </m:r>
+                    <m:r>
+                      <a:rPr lang="pt-BR" sz="2800" b="1" i="1" dirty="0" smtClean="0">
+                        <a:latin typeface="Cambria Math" panose="02040503050406030204" pitchFamily="18" charset="0"/>
+                      </a:rPr>
+                      <m:t>𝒏</m:t>
+                    </m:r>
+                    <m:r>
+                      <a:rPr lang="pt-BR" sz="2800" b="1" i="1" dirty="0" smtClean="0">
+                        <a:latin typeface="Cambria Math" panose="02040503050406030204" pitchFamily="18" charset="0"/>
+                      </a:rPr>
+                      <m:t>₂ × … × </m:t>
+                    </m:r>
+                    <m:r>
+                      <a:rPr lang="pt-BR" sz="2800" b="1" i="1" dirty="0" smtClean="0">
+                        <a:latin typeface="Cambria Math" panose="02040503050406030204" pitchFamily="18" charset="0"/>
+                      </a:rPr>
+                      <m:t>𝒏</m:t>
+                    </m:r>
+                    <m:r>
+                      <a:rPr lang="pt-BR" sz="2800" b="1" i="1" dirty="0" smtClean="0">
+                        <a:latin typeface="Cambria Math" panose="02040503050406030204" pitchFamily="18" charset="0"/>
+                      </a:rPr>
+                      <m:t>ₖ</m:t>
+                    </m:r>
+                    <m:r>
+                      <a:rPr lang="pt-BR" sz="2800" i="1" dirty="0" smtClean="0">
+                        <a:latin typeface="Cambria Math" panose="02040503050406030204" pitchFamily="18" charset="0"/>
+                      </a:rPr>
+                      <m:t>.</m:t>
+                    </m:r>
+                  </m:oMath>
+                </a14:m>
+                <a:endParaRPr lang="pt-BR" sz="2800" dirty="0"/>
+              </a:p>
+              <a:p>
+                <a:pPr rtl="0">
+                  <a:lnSpc>
+                    <a:spcPct val="150000"/>
+                  </a:lnSpc>
+                </a:pPr>
+                <a:r>
+                  <a:rPr lang="pt-BR" sz="2800" dirty="0"/>
+                  <a:t>Também chamada </a:t>
+                </a:r>
+                <a:r>
+                  <a:rPr lang="pt-BR" sz="2800" b="1" dirty="0"/>
+                  <a:t>princípio multiplicativo</a:t>
+                </a:r>
+                <a:r>
+                  <a:rPr lang="pt-BR" sz="2800" dirty="0"/>
+                  <a:t>.</a:t>
+                </a:r>
+              </a:p>
+              <a:p>
+                <a:pPr>
+                  <a:lnSpc>
+                    <a:spcPct val="150000"/>
+                  </a:lnSpc>
+                </a:pPr>
+                <a:endParaRPr lang="pt-BR" sz="2800" dirty="0"/>
+              </a:p>
+            </p:txBody>
+          </p:sp>
+        </mc:Choice>
+        <mc:Fallback xmlns="">
+          <p:sp>
+            <p:nvSpPr>
+              <p:cNvPr id="6" name="CaixaDeTexto 5">
+                <a:extLst>
+                  <a:ext uri="{FF2B5EF4-FFF2-40B4-BE49-F238E27FC236}">
+                    <a16:creationId xmlns:a16="http://schemas.microsoft.com/office/drawing/2014/main" id="{720B10DA-C761-4DEE-8D86-E170E1C2E981}"/>
+                  </a:ext>
+                </a:extLst>
+              </p:cNvPr>
+              <p:cNvSpPr txBox="1">
+                <a:spLocks noRot="1" noChangeAspect="1" noMove="1" noResize="1" noEditPoints="1" noAdjustHandles="1" noChangeArrowheads="1" noChangeShapeType="1" noTextEdit="1"/>
+              </p:cNvSpPr>
+              <p:nvPr/>
+            </p:nvSpPr>
+            <p:spPr>
+              <a:xfrm>
+                <a:off x="585596" y="661503"/>
+                <a:ext cx="10748061" cy="3903504"/>
+              </a:xfrm>
+              <a:prstGeom prst="rect">
+                <a:avLst/>
+              </a:prstGeom>
+              <a:blipFill>
+                <a:blip r:embed="rId2"/>
+                <a:stretch>
+                  <a:fillRect l="-1134"/>
+                </a:stretch>
+              </a:blipFill>
+            </p:spPr>
+            <p:txBody>
+              <a:bodyPr/>
+              <a:lstStyle/>
+              <a:p>
+                <a:r>
+                  <a:rPr lang="pt-BR">
+                    <a:noFill/>
+                  </a:rPr>
+                  <a:t> </a:t>
+                </a:r>
+              </a:p>
+            </p:txBody>
+          </p:sp>
+        </mc:Fallback>
+      </mc:AlternateContent>
+      <p:sp>
+        <p:nvSpPr>
+          <p:cNvPr id="3" name="CaixaDeTexto 2">
+            <a:extLst>
+              <a:ext uri="{FF2B5EF4-FFF2-40B4-BE49-F238E27FC236}">
+                <a16:creationId xmlns:a16="http://schemas.microsoft.com/office/drawing/2014/main" id="{19131A04-B5D6-4211-8B49-4615DE5797E9}"/>
+              </a:ext>
+            </a:extLst>
+          </p:cNvPr>
+          <p:cNvSpPr txBox="1"/>
+          <p:nvPr/>
+        </p:nvSpPr>
+        <p:spPr>
+          <a:xfrm>
+            <a:off x="361188" y="6463893"/>
+            <a:ext cx="7772400" cy="308152"/>
+          </a:xfrm>
+          <a:prstGeom prst="rect">
+            <a:avLst/>
+          </a:prstGeom>
+          <a:noFill/>
+        </p:spPr>
+        <p:txBody>
+          <a:bodyPr wrap="none" rtlCol="0">
+            <a:spAutoFit/>
+          </a:bodyPr>
+          <a:lstStyle/>
+          <a:p>
+            <a:r>
+              <a:rPr lang="pt-BR" sz="1400" dirty="0"/>
+              <a:t>CEA055 – Estatística e Probabilidade – Prof. Marcos Goulart Lima</a:t>
+            </a:r>
+          </a:p>
+        </p:txBody>
+      </p:sp>
+    </p:spTree>
+    <p:extLst>
+      <p:ext uri="{BB962C8B-B14F-4D97-AF65-F5344CB8AC3E}">
+        <p14:creationId xmlns:p14="http://schemas.microsoft.com/office/powerpoint/2010/main" val="703661322"/>
       </p:ext>
     </p:extLst>
   </p:cSld>
@@ -9853,129 +10491,27 @@
                 </a:pPr>
                 <a:r>
                   <a:rPr lang="pt-BR" sz="2800" b="1" dirty="0"/>
-                  <a:t>Princípio multiplicativo</a:t>
-                </a:r>
-              </a:p>
-              <a:p>
-                <a:pPr rtl="0">
-                  <a:lnSpc>
-                    <a:spcPct val="150000"/>
-                  </a:lnSpc>
-                </a:pPr>
+                  <a:t>Exemplo. </a:t>
+                </a:r>
                 <a:r>
                   <a:rPr lang="pt-BR" sz="2800" dirty="0"/>
-                  <a:t>Se uma operação é feita em </a:t>
-                </a:r>
-                <a14:m>
-                  <m:oMath xmlns:m="http://schemas.openxmlformats.org/officeDocument/2006/math">
-                    <m:r>
-                      <a:rPr lang="pt-BR" sz="2800" b="1" i="1" dirty="0" smtClean="0">
-                        <a:latin typeface="Cambria Math" panose="02040503050406030204" pitchFamily="18" charset="0"/>
-                      </a:rPr>
-                      <m:t>𝒌</m:t>
-                    </m:r>
-                  </m:oMath>
-                </a14:m>
+                  <a:t>(Montgomery &amp; </a:t>
+                </a:r>
+                <a:r>
+                  <a:rPr lang="pt-BR" sz="2800" dirty="0" err="1"/>
+                  <a:t>Runger</a:t>
+                </a:r>
                 <a:r>
                   <a:rPr lang="pt-BR" sz="2800" dirty="0"/>
-                  <a:t> etapas, e a etapa i pode ser realizada de </a:t>
-                </a:r>
-                <a14:m>
-                  <m:oMath xmlns:m="http://schemas.openxmlformats.org/officeDocument/2006/math">
-                    <m:r>
-                      <a:rPr lang="pt-BR" sz="2800" b="1" i="1" dirty="0" smtClean="0">
-                        <a:latin typeface="Cambria Math" panose="02040503050406030204" pitchFamily="18" charset="0"/>
-                      </a:rPr>
-                      <m:t>𝒏</m:t>
-                    </m:r>
-                    <m:r>
-                      <a:rPr lang="pt-BR" sz="2800" b="1" i="1" dirty="0" smtClean="0">
-                        <a:latin typeface="Cambria Math" panose="02040503050406030204" pitchFamily="18" charset="0"/>
-                      </a:rPr>
-                      <m:t>ᵢ</m:t>
-                    </m:r>
-                  </m:oMath>
-                </a14:m>
+                  <a:t> 2.7.)</a:t>
+                </a:r>
+                <a:r>
+                  <a:rPr lang="pt-BR" sz="2800" b="1" dirty="0"/>
+                  <a:t> </a:t>
+                </a:r>
                 <a:r>
                   <a:rPr lang="pt-BR" sz="2800" dirty="0"/>
-                  <a:t> maneiras, o total de maneiras de completar a operação é</a:t>
-                </a:r>
-              </a:p>
-              <a:p>
-                <a:pPr algn="ctr" rtl="0">
-                  <a:lnSpc>
-                    <a:spcPct val="150000"/>
-                  </a:lnSpc>
-                </a:pPr>
-                <a:r>
-                  <a:rPr lang="pt-BR" sz="2800" dirty="0"/>
-                  <a:t> </a:t>
-                </a:r>
-                <a14:m>
-                  <m:oMath xmlns:m="http://schemas.openxmlformats.org/officeDocument/2006/math">
-                    <m:r>
-                      <a:rPr lang="pt-BR" sz="2800" b="1" i="1" dirty="0" smtClean="0">
-                        <a:latin typeface="Cambria Math" panose="02040503050406030204" pitchFamily="18" charset="0"/>
-                      </a:rPr>
-                      <m:t>𝒏</m:t>
-                    </m:r>
-                    <m:r>
-                      <a:rPr lang="pt-BR" sz="2800" b="1" i="1" dirty="0" smtClean="0">
-                        <a:latin typeface="Cambria Math" panose="02040503050406030204" pitchFamily="18" charset="0"/>
-                      </a:rPr>
-                      <m:t>₁ × </m:t>
-                    </m:r>
-                    <m:r>
-                      <a:rPr lang="pt-BR" sz="2800" b="1" i="1" dirty="0" smtClean="0">
-                        <a:latin typeface="Cambria Math" panose="02040503050406030204" pitchFamily="18" charset="0"/>
-                      </a:rPr>
-                      <m:t>𝒏</m:t>
-                    </m:r>
-                    <m:r>
-                      <a:rPr lang="pt-BR" sz="2800" b="1" i="1" dirty="0" smtClean="0">
-                        <a:latin typeface="Cambria Math" panose="02040503050406030204" pitchFamily="18" charset="0"/>
-                      </a:rPr>
-                      <m:t>₂ × … × </m:t>
-                    </m:r>
-                    <m:r>
-                      <a:rPr lang="pt-BR" sz="2800" b="1" i="1" dirty="0" smtClean="0">
-                        <a:latin typeface="Cambria Math" panose="02040503050406030204" pitchFamily="18" charset="0"/>
-                      </a:rPr>
-                      <m:t>𝒏</m:t>
-                    </m:r>
-                    <m:r>
-                      <a:rPr lang="pt-BR" sz="2800" b="1" i="1" dirty="0" smtClean="0">
-                        <a:latin typeface="Cambria Math" panose="02040503050406030204" pitchFamily="18" charset="0"/>
-                      </a:rPr>
-                      <m:t>ₖ</m:t>
-                    </m:r>
-                    <m:r>
-                      <a:rPr lang="pt-BR" sz="2800" i="1" dirty="0" smtClean="0">
-                        <a:latin typeface="Cambria Math" panose="02040503050406030204" pitchFamily="18" charset="0"/>
-                      </a:rPr>
-                      <m:t>.</m:t>
-                    </m:r>
-                  </m:oMath>
-                </a14:m>
-                <a:endParaRPr lang="pt-BR" sz="2800" dirty="0"/>
-              </a:p>
-              <a:p>
-                <a:pPr rtl="0">
-                  <a:lnSpc>
-                    <a:spcPct val="150000"/>
-                  </a:lnSpc>
-                </a:pPr>
-                <a:r>
-                  <a:rPr lang="pt-BR" sz="2800" dirty="0"/>
-                  <a:t>Também chamada </a:t>
-                </a:r>
-                <a:r>
-                  <a:rPr lang="pt-BR" sz="2800" b="1" dirty="0"/>
-                  <a:t>princípio multiplicativo</a:t>
-                </a:r>
-                <a:r>
-                  <a:rPr lang="pt-BR" sz="2800" dirty="0"/>
-                  <a:t>.</a:t>
+                  <a:t>Projeto de site - Um site tem 4 cores, 3 fontes e 3 posições de imagem possíveis. Quantos projetos diferentes é possível fazer com as opções acima?</a:t>
                 </a:r>
               </a:p>
               <a:p>
@@ -9984,7 +10520,77 @@
                     <a:spcPct val="150000"/>
                   </a:lnSpc>
                 </a:pPr>
-                <a:endParaRPr lang="pt-BR" sz="2800" dirty="0"/>
+                <a:r>
+                  <a:rPr lang="pt-BR" sz="2800" dirty="0"/>
+                  <a:t> </a:t>
+                </a:r>
+              </a:p>
+              <a:p>
+                <a:pPr>
+                  <a:lnSpc>
+                    <a:spcPct val="150000"/>
+                  </a:lnSpc>
+                </a:pPr>
+                <a:r>
+                  <a:rPr lang="pt-BR" sz="2800" dirty="0"/>
+                  <a:t>Resposta: Pela regra da multiplicação: </a:t>
+                </a:r>
+                <a14:m>
+                  <m:oMath xmlns:m="http://schemas.openxmlformats.org/officeDocument/2006/math">
+                    <m:r>
+                      <a:rPr lang="pt-BR" sz="2800" i="1" dirty="0" smtClean="0">
+                        <a:latin typeface="Cambria Math" panose="02040503050406030204" pitchFamily="18" charset="0"/>
+                      </a:rPr>
+                      <m:t>4</m:t>
+                    </m:r>
+                    <m:r>
+                      <a:rPr lang="pt-BR" sz="2800" i="1" dirty="0" smtClean="0">
+                        <a:latin typeface="Cambria Math" panose="02040503050406030204" pitchFamily="18" charset="0"/>
+                      </a:rPr>
+                      <m:t> × </m:t>
+                    </m:r>
+                    <m:r>
+                      <a:rPr lang="pt-BR" sz="2800" i="1" dirty="0" smtClean="0">
+                        <a:latin typeface="Cambria Math" panose="02040503050406030204" pitchFamily="18" charset="0"/>
+                      </a:rPr>
+                      <m:t>3</m:t>
+                    </m:r>
+                    <m:r>
+                      <a:rPr lang="pt-BR" sz="2800" i="1" dirty="0" smtClean="0">
+                        <a:latin typeface="Cambria Math" panose="02040503050406030204" pitchFamily="18" charset="0"/>
+                      </a:rPr>
+                      <m:t> × </m:t>
+                    </m:r>
+                    <m:r>
+                      <a:rPr lang="pt-BR" sz="2800" i="1" dirty="0" smtClean="0">
+                        <a:latin typeface="Cambria Math" panose="02040503050406030204" pitchFamily="18" charset="0"/>
+                      </a:rPr>
+                      <m:t>3</m:t>
+                    </m:r>
+                    <m:r>
+                      <a:rPr lang="pt-BR" sz="2800" i="1" dirty="0" smtClean="0">
+                        <a:latin typeface="Cambria Math" panose="02040503050406030204" pitchFamily="18" charset="0"/>
+                      </a:rPr>
+                      <m:t> = </m:t>
+                    </m:r>
+                    <m:r>
+                      <a:rPr lang="pt-BR" sz="2800" i="1" dirty="0" smtClean="0">
+                        <a:latin typeface="Cambria Math" panose="02040503050406030204" pitchFamily="18" charset="0"/>
+                      </a:rPr>
+                      <m:t>36</m:t>
+                    </m:r>
+                    <m:r>
+                      <a:rPr lang="pt-BR" sz="2800" i="1" dirty="0" smtClean="0">
+                        <a:latin typeface="Cambria Math" panose="02040503050406030204" pitchFamily="18" charset="0"/>
+                      </a:rPr>
+                      <m:t> </m:t>
+                    </m:r>
+                  </m:oMath>
+                </a14:m>
+                <a:r>
+                  <a:rPr lang="pt-BR" sz="2800" dirty="0"/>
+                  <a:t>projetos diferentes possíveis.</a:t>
+                </a:r>
               </a:p>
             </p:txBody>
           </p:sp>
@@ -10015,7 +10621,7 @@
               <a:blipFill>
                 <a:blip r:embed="rId2"/>
                 <a:stretch>
-                  <a:fillRect l="-1134"/>
+                  <a:fillRect l="-1134" b="-3594"/>
                 </a:stretch>
               </a:blipFill>
             </p:spPr>
@@ -10072,7 +10678,7 @@
     </p:spTree>
     <p:extLst>
       <p:ext uri="{BB962C8B-B14F-4D97-AF65-F5344CB8AC3E}">
-        <p14:creationId xmlns:p14="http://schemas.microsoft.com/office/powerpoint/2010/main" val="703661322"/>
+        <p14:creationId xmlns:p14="http://schemas.microsoft.com/office/powerpoint/2010/main" val="837101016"/>
       </p:ext>
     </p:extLst>
   </p:cSld>
@@ -10116,7 +10722,7 @@
             <p:spPr>
               <a:xfrm>
                 <a:off x="585596" y="661503"/>
-                <a:ext cx="10748061" cy="3903504"/>
+                <a:ext cx="10748061" cy="5196166"/>
               </a:xfrm>
               <a:prstGeom prst="rect">
                 <a:avLst/>
@@ -10136,27 +10742,44 @@
                 </a:pPr>
                 <a:r>
                   <a:rPr lang="pt-BR" sz="2800" b="1" dirty="0"/>
-                  <a:t>Exemplo. </a:t>
-                </a:r>
-                <a:r>
-                  <a:rPr lang="pt-BR" sz="2800" dirty="0"/>
-                  <a:t>(Montgomery &amp; </a:t>
-                </a:r>
-                <a:r>
-                  <a:rPr lang="pt-BR" sz="2800" dirty="0" err="1"/>
-                  <a:t>Runger</a:t>
-                </a:r>
-                <a:r>
-                  <a:rPr lang="pt-BR" sz="2800" dirty="0"/>
-                  <a:t> 2.7.)</a:t>
-                </a:r>
+                  <a:t>Permutação - </a:t>
+                </a:r>
+                <a14:m>
+                  <m:oMath xmlns:m="http://schemas.openxmlformats.org/officeDocument/2006/math">
+                    <m:sSub>
+                      <m:sSubPr>
+                        <m:ctrlPr>
+                          <a:rPr lang="pt-BR" sz="2800" b="1" i="1" smtClean="0">
+                            <a:latin typeface="Cambria Math" panose="02040503050406030204" pitchFamily="18" charset="0"/>
+                          </a:rPr>
+                        </m:ctrlPr>
+                      </m:sSubPr>
+                      <m:e>
+                        <m:r>
+                          <a:rPr lang="pt-BR" sz="2800" b="1" i="1" smtClean="0">
+                            <a:latin typeface="Cambria Math" panose="02040503050406030204" pitchFamily="18" charset="0"/>
+                          </a:rPr>
+                          <m:t>𝑷</m:t>
+                        </m:r>
+                      </m:e>
+                      <m:sub>
+                        <m:r>
+                          <a:rPr lang="pt-BR" sz="2800" b="1" i="1" smtClean="0">
+                            <a:latin typeface="Cambria Math" panose="02040503050406030204" pitchFamily="18" charset="0"/>
+                          </a:rPr>
+                          <m:t>𝒏</m:t>
+                        </m:r>
+                      </m:sub>
+                    </m:sSub>
+                  </m:oMath>
+                </a14:m>
                 <a:r>
                   <a:rPr lang="pt-BR" sz="2800" b="1" dirty="0"/>
                   <a:t> </a:t>
                 </a:r>
                 <a:r>
                   <a:rPr lang="pt-BR" sz="2800" dirty="0"/>
-                  <a:t>Projeto de site - Um site tem 4 cores, 3 fontes e 3 posições de imagem possíveis. Quantos projetos diferentes é possível fazer com as opções acima?</a:t>
+                  <a:t>(ou permutação simples)</a:t>
                 </a:r>
               </a:p>
               <a:p>
@@ -10167,7 +10790,7 @@
                 </a:pPr>
                 <a:r>
                   <a:rPr lang="pt-BR" sz="2800" dirty="0"/>
-                  <a:t> </a:t>
+                  <a:t>Uma permutação de um conjunto é uma sequência ordenada de seus elementos.</a:t>
                 </a:r>
               </a:p>
               <a:p>
@@ -10176,9 +10799,21 @@
                     <a:spcPct val="150000"/>
                   </a:lnSpc>
                 </a:pPr>
+                <a:endParaRPr lang="pt-BR" sz="2800" b="1" dirty="0"/>
+              </a:p>
+              <a:p>
+                <a:pPr>
+                  <a:lnSpc>
+                    <a:spcPct val="150000"/>
+                  </a:lnSpc>
+                </a:pPr>
+                <a:r>
+                  <a:rPr lang="pt-BR" sz="2800" b="1" dirty="0"/>
+                  <a:t>Exemplo:</a:t>
+                </a:r>
                 <a:r>
                   <a:rPr lang="pt-BR" sz="2800" dirty="0"/>
-                  <a:t>Resposta: Pela regra da multiplicação: </a:t>
+                  <a:t> Quantas permutações existem do conjunto </a:t>
                 </a:r>
                 <a14:m>
                   <m:oMath xmlns:m="http://schemas.openxmlformats.org/officeDocument/2006/math">
@@ -10186,13 +10821,228 @@
                       <a:rPr lang="pt-BR" sz="2800" i="1" dirty="0" smtClean="0">
                         <a:latin typeface="Cambria Math" panose="02040503050406030204" pitchFamily="18" charset="0"/>
                       </a:rPr>
-                      <m:t>4 × 3 × 3 = 36 </m:t>
+                      <m:t>𝑆</m:t>
+                    </m:r>
+                    <m:r>
+                      <a:rPr lang="pt-BR" sz="2800" i="1" dirty="0" smtClean="0">
+                        <a:latin typeface="Cambria Math" panose="02040503050406030204" pitchFamily="18" charset="0"/>
+                      </a:rPr>
+                      <m:t> = {</m:t>
+                    </m:r>
+                    <m:r>
+                      <a:rPr lang="pt-BR" sz="2800" i="1" dirty="0" smtClean="0">
+                        <a:latin typeface="Cambria Math" panose="02040503050406030204" pitchFamily="18" charset="0"/>
+                      </a:rPr>
+                      <m:t>𝑎</m:t>
+                    </m:r>
+                    <m:r>
+                      <a:rPr lang="pt-BR" sz="2800" i="1" dirty="0" smtClean="0">
+                        <a:latin typeface="Cambria Math" panose="02040503050406030204" pitchFamily="18" charset="0"/>
+                      </a:rPr>
+                      <m:t>, </m:t>
+                    </m:r>
+                    <m:r>
+                      <a:rPr lang="pt-BR" sz="2800" i="1" dirty="0" smtClean="0">
+                        <a:latin typeface="Cambria Math" panose="02040503050406030204" pitchFamily="18" charset="0"/>
+                      </a:rPr>
+                      <m:t>𝑏</m:t>
+                    </m:r>
+                    <m:r>
+                      <a:rPr lang="pt-BR" sz="2800" i="1" dirty="0" smtClean="0">
+                        <a:latin typeface="Cambria Math" panose="02040503050406030204" pitchFamily="18" charset="0"/>
+                      </a:rPr>
+                      <m:t>, </m:t>
+                    </m:r>
+                    <m:r>
+                      <a:rPr lang="pt-BR" sz="2800" i="1" dirty="0" smtClean="0">
+                        <a:latin typeface="Cambria Math" panose="02040503050406030204" pitchFamily="18" charset="0"/>
+                      </a:rPr>
+                      <m:t>𝑐</m:t>
+                    </m:r>
+                    <m:r>
+                      <a:rPr lang="pt-BR" sz="2800" i="1" dirty="0" smtClean="0">
+                        <a:latin typeface="Cambria Math" panose="02040503050406030204" pitchFamily="18" charset="0"/>
+                      </a:rPr>
+                      <m:t>}</m:t>
                     </m:r>
                   </m:oMath>
                 </a14:m>
                 <a:r>
                   <a:rPr lang="pt-BR" sz="2800" dirty="0"/>
-                  <a:t>projetos diferentes possíveis.</a:t>
+                  <a:t>?</a:t>
+                </a:r>
+              </a:p>
+              <a:p>
+                <a:pPr>
+                  <a:lnSpc>
+                    <a:spcPct val="150000"/>
+                  </a:lnSpc>
+                </a:pPr>
+                <a:r>
+                  <a:rPr lang="pt-BR" sz="2800" dirty="0"/>
+                  <a:t>Resposta: </a:t>
+                </a:r>
+                <a14:m>
+                  <m:oMath xmlns:m="http://schemas.openxmlformats.org/officeDocument/2006/math">
+                    <m:r>
+                      <a:rPr lang="pt-BR" sz="2800" i="1" dirty="0" smtClean="0">
+                        <a:latin typeface="Cambria Math" panose="02040503050406030204" pitchFamily="18" charset="0"/>
+                      </a:rPr>
+                      <m:t>𝑎𝑏𝑐</m:t>
+                    </m:r>
+                    <m:r>
+                      <a:rPr lang="pt-BR" sz="2800" i="1" dirty="0" smtClean="0">
+                        <a:latin typeface="Cambria Math" panose="02040503050406030204" pitchFamily="18" charset="0"/>
+                      </a:rPr>
+                      <m:t>, </m:t>
+                    </m:r>
+                    <m:r>
+                      <a:rPr lang="pt-BR" sz="2800" i="1" dirty="0" err="1" smtClean="0">
+                        <a:latin typeface="Cambria Math" panose="02040503050406030204" pitchFamily="18" charset="0"/>
+                      </a:rPr>
+                      <m:t>𝑎𝑐𝑏</m:t>
+                    </m:r>
+                    <m:r>
+                      <a:rPr lang="pt-BR" sz="2800" i="1" dirty="0" smtClean="0">
+                        <a:latin typeface="Cambria Math" panose="02040503050406030204" pitchFamily="18" charset="0"/>
+                      </a:rPr>
+                      <m:t>, </m:t>
+                    </m:r>
+                    <m:r>
+                      <a:rPr lang="pt-BR" sz="2800" i="1" dirty="0" err="1" smtClean="0">
+                        <a:latin typeface="Cambria Math" panose="02040503050406030204" pitchFamily="18" charset="0"/>
+                      </a:rPr>
+                      <m:t>𝑏𝑎𝑐</m:t>
+                    </m:r>
+                    <m:r>
+                      <a:rPr lang="pt-BR" sz="2800" i="1" dirty="0" smtClean="0">
+                        <a:latin typeface="Cambria Math" panose="02040503050406030204" pitchFamily="18" charset="0"/>
+                      </a:rPr>
+                      <m:t>, </m:t>
+                    </m:r>
+                    <m:r>
+                      <a:rPr lang="pt-BR" sz="2800" i="1" dirty="0" err="1" smtClean="0">
+                        <a:latin typeface="Cambria Math" panose="02040503050406030204" pitchFamily="18" charset="0"/>
+                      </a:rPr>
+                      <m:t>𝑏𝑐𝑎</m:t>
+                    </m:r>
+                    <m:r>
+                      <a:rPr lang="pt-BR" sz="2800" i="1" dirty="0" smtClean="0">
+                        <a:latin typeface="Cambria Math" panose="02040503050406030204" pitchFamily="18" charset="0"/>
+                      </a:rPr>
+                      <m:t>, </m:t>
+                    </m:r>
+                    <m:r>
+                      <a:rPr lang="pt-BR" sz="2800" i="1" dirty="0" err="1" smtClean="0">
+                        <a:latin typeface="Cambria Math" panose="02040503050406030204" pitchFamily="18" charset="0"/>
+                      </a:rPr>
+                      <m:t>𝑐𝑎𝑏</m:t>
+                    </m:r>
+                    <m:r>
+                      <a:rPr lang="pt-BR" sz="2800" i="1" dirty="0" smtClean="0">
+                        <a:latin typeface="Cambria Math" panose="02040503050406030204" pitchFamily="18" charset="0"/>
+                      </a:rPr>
+                      <m:t>, </m:t>
+                    </m:r>
+                    <m:r>
+                      <a:rPr lang="pt-BR" sz="2800" i="1" dirty="0" err="1" smtClean="0">
+                        <a:latin typeface="Cambria Math" panose="02040503050406030204" pitchFamily="18" charset="0"/>
+                      </a:rPr>
+                      <m:t>𝑐𝑏𝑎</m:t>
+                    </m:r>
+                  </m:oMath>
+                </a14:m>
+                <a:r>
+                  <a:rPr lang="pt-BR" sz="2800" dirty="0"/>
+                  <a:t> — 6 permutações. </a:t>
+                </a:r>
+              </a:p>
+              <a:p>
+                <a:pPr>
+                  <a:lnSpc>
+                    <a:spcPct val="150000"/>
+                  </a:lnSpc>
+                </a:pPr>
+                <a:r>
+                  <a:rPr lang="pt-BR" sz="2800" dirty="0"/>
+                  <a:t>Em geral, o número de permutações de n elementos diferentes é </a:t>
+                </a:r>
+                <a14:m>
+                  <m:oMath xmlns:m="http://schemas.openxmlformats.org/officeDocument/2006/math">
+                    <m:sSub>
+                      <m:sSubPr>
+                        <m:ctrlPr>
+                          <a:rPr lang="pt-BR" sz="2800" b="0" i="1" smtClean="0">
+                            <a:latin typeface="Cambria Math" panose="02040503050406030204" pitchFamily="18" charset="0"/>
+                          </a:rPr>
+                        </m:ctrlPr>
+                      </m:sSubPr>
+                      <m:e>
+                        <m:r>
+                          <a:rPr lang="pt-BR" sz="2800" b="0" i="1" smtClean="0">
+                            <a:latin typeface="Cambria Math" panose="02040503050406030204" pitchFamily="18" charset="0"/>
+                          </a:rPr>
+                          <m:t>𝑃</m:t>
+                        </m:r>
+                      </m:e>
+                      <m:sub>
+                        <m:r>
+                          <a:rPr lang="pt-BR" sz="2800" b="0" i="1" smtClean="0">
+                            <a:latin typeface="Cambria Math" panose="02040503050406030204" pitchFamily="18" charset="0"/>
+                          </a:rPr>
+                          <m:t>𝑛</m:t>
+                        </m:r>
+                      </m:sub>
+                    </m:sSub>
+                    <m:r>
+                      <a:rPr lang="pt-BR" sz="2800" b="0" i="1" smtClean="0">
+                        <a:latin typeface="Cambria Math" panose="02040503050406030204" pitchFamily="18" charset="0"/>
+                      </a:rPr>
+                      <m:t>=</m:t>
+                    </m:r>
+                    <m:r>
+                      <a:rPr lang="pt-BR" sz="2800" b="0" i="1" smtClean="0">
+                        <a:latin typeface="Cambria Math" panose="02040503050406030204" pitchFamily="18" charset="0"/>
+                      </a:rPr>
+                      <m:t>𝑛</m:t>
+                    </m:r>
+                    <m:r>
+                      <a:rPr lang="pt-BR" sz="2800" b="0" i="1" smtClean="0">
+                        <a:latin typeface="Cambria Math" panose="02040503050406030204" pitchFamily="18" charset="0"/>
+                      </a:rPr>
+                      <m:t>!</m:t>
+                    </m:r>
+                  </m:oMath>
+                </a14:m>
+                <a:r>
+                  <a:rPr lang="pt-BR" sz="2800" dirty="0"/>
+                  <a:t> (aqui, </a:t>
+                </a:r>
+                <a14:m>
+                  <m:oMath xmlns:m="http://schemas.openxmlformats.org/officeDocument/2006/math">
+                    <m:r>
+                      <a:rPr lang="pt-BR" sz="2800" i="1" dirty="0" smtClean="0">
+                        <a:latin typeface="Cambria Math" panose="02040503050406030204" pitchFamily="18" charset="0"/>
+                      </a:rPr>
+                      <m:t>3</m:t>
+                    </m:r>
+                    <m:r>
+                      <a:rPr lang="pt-BR" sz="2800" i="1" dirty="0" smtClean="0">
+                        <a:latin typeface="Cambria Math" panose="02040503050406030204" pitchFamily="18" charset="0"/>
+                      </a:rPr>
+                      <m:t>! = </m:t>
+                    </m:r>
+                    <m:r>
+                      <a:rPr lang="pt-BR" sz="2800" i="1" dirty="0" smtClean="0">
+                        <a:latin typeface="Cambria Math" panose="02040503050406030204" pitchFamily="18" charset="0"/>
+                      </a:rPr>
+                      <m:t>6</m:t>
+                    </m:r>
+                  </m:oMath>
+                </a14:m>
+                <a:r>
+                  <a:rPr lang="pt-BR" sz="2800" dirty="0"/>
+                  <a:t>).</a:t>
                 </a:r>
               </a:p>
             </p:txBody>
@@ -10216,7 +11066,7 @@
             <p:spPr>
               <a:xfrm>
                 <a:off x="585596" y="661503"/>
-                <a:ext cx="10748061" cy="3903504"/>
+                <a:ext cx="10748061" cy="5196166"/>
               </a:xfrm>
               <a:prstGeom prst="rect">
                 <a:avLst/>
@@ -10224,7 +11074,7 @@
               <a:blipFill>
                 <a:blip r:embed="rId2"/>
                 <a:stretch>
-                  <a:fillRect l="-1134" b="-3594"/>
+                  <a:fillRect l="-1134" b="-2465"/>
                 </a:stretch>
               </a:blipFill>
             </p:spPr>
@@ -10281,7 +11131,7 @@
     </p:spTree>
     <p:extLst>
       <p:ext uri="{BB962C8B-B14F-4D97-AF65-F5344CB8AC3E}">
-        <p14:creationId xmlns:p14="http://schemas.microsoft.com/office/powerpoint/2010/main" val="837101016"/>
+        <p14:creationId xmlns:p14="http://schemas.microsoft.com/office/powerpoint/2010/main" val="2264850509"/>
       </p:ext>
     </p:extLst>
   </p:cSld>
